--- a/Inglês/Março 26/Aula 16/databases.pptx
+++ b/Inglês/Março 26/Aula 16/databases.pptx
@@ -1,25 +1,28 @@
 
 <file path=ppt/presentation.xml><?xml version="1.0" encoding="utf-8"?>
-<p:presentation xmlns:a="http://schemas.openxmlformats.org/drawingml/2006/main" xmlns:r="http://schemas.openxmlformats.org/officeDocument/2006/relationships" xmlns:p="http://schemas.openxmlformats.org/presentationml/2006/main" saveSubsetFonts="1" embedTrueTypeFonts="true">
+<p:presentation xmlns:a="http://schemas.openxmlformats.org/drawingml/2006/main" xmlns:r="http://schemas.openxmlformats.org/officeDocument/2006/relationships" xmlns:p="http://schemas.openxmlformats.org/presentationml/2006/main" embedTrueTypeFonts="1" saveSubsetFonts="1">
   <p:sldMasterIdLst>
     <p:sldMasterId id="2147483648" r:id="rId1"/>
   </p:sldMasterIdLst>
   <p:sldIdLst>
-    <p:sldId id="256" r:id="rId6"/>
-    <p:sldId id="257" r:id="rId7"/>
-    <p:sldId id="258" r:id="rId8"/>
-    <p:sldId id="259" r:id="rId9"/>
+    <p:sldId id="256" r:id="rId2"/>
+    <p:sldId id="257" r:id="rId3"/>
+    <p:sldId id="258" r:id="rId4"/>
+    <p:sldId id="259" r:id="rId5"/>
   </p:sldIdLst>
   <p:sldSz cx="18288000" cy="10287000"/>
   <p:notesSz cx="6858000" cy="9144000"/>
   <p:embeddedFontLst>
     <p:embeddedFont>
-      <p:font typeface="Handy Casual" charset="1" panose="00000500000000000000"/>
-      <p:regular r:id="rId10"/>
+      <p:font typeface="Calibri" panose="020F0502020204030204" pitchFamily="34" charset="0"/>
+      <p:regular r:id="rId6"/>
+      <p:bold r:id="rId7"/>
+      <p:italic r:id="rId8"/>
+      <p:boldItalic r:id="rId9"/>
     </p:embeddedFont>
     <p:embeddedFont>
-      <p:font typeface="Gloria Hallelujah" charset="1" panose="02000000000000000000"/>
-      <p:regular r:id="rId11"/>
+      <p:font typeface="Handy Casual" panose="020B0604020202020204" charset="0"/>
+      <p:regular r:id="rId10"/>
     </p:embeddedFont>
   </p:embeddedFontLst>
   <p:defaultTextStyle>
@@ -117,6 +120,22 @@
       </a:defRPr>
     </a:lvl9pPr>
   </p:defaultTextStyle>
+  <p:extLst>
+    <p:ext uri="{EFAFB233-063F-42B5-8137-9DF3F51BA10A}">
+      <p15:sldGuideLst xmlns:p15="http://schemas.microsoft.com/office/powerpoint/2012/main">
+        <p15:guide id="1" orient="horz" pos="2160">
+          <p15:clr>
+            <a:srgbClr val="A4A3A4"/>
+          </p15:clr>
+        </p15:guide>
+        <p15:guide id="2" pos="2880">
+          <p15:clr>
+            <a:srgbClr val="A4A3A4"/>
+          </p15:clr>
+        </p15:guide>
+      </p15:sldGuideLst>
+    </p:ext>
+  </p:extLst>
 </p:presentation>
 </file>
 
@@ -158,10 +177,9 @@
           <a:lstStyle/>
           <a:p>
             <a:r>
-              <a:rPr lang="en-US" smtClean="0"/>
+              <a:rPr lang="en-US"/>
               <a:t>Click to edit Master title style</a:t>
             </a:r>
-            <a:endParaRPr lang="en-US"/>
           </a:p>
         </p:txBody>
       </p:sp>
@@ -277,10 +295,9 @@
           </a:lstStyle>
           <a:p>
             <a:r>
-              <a:rPr lang="en-US" smtClean="0"/>
+              <a:rPr lang="en-US"/>
               <a:t>Click to edit Master subtitle style</a:t>
             </a:r>
-            <a:endParaRPr lang="en-US"/>
           </a:p>
         </p:txBody>
       </p:sp>
@@ -302,7 +319,7 @@
             <a:fld id="{1D8BD707-D9CF-40AE-B4C6-C98DA3205C09}" type="datetimeFigureOut">
               <a:rPr lang="en-US" smtClean="0"/>
               <a:pPr/>
-              <a:t>8/1/2011</a:t>
+              <a:t>3/18/2026</a:t>
             </a:fld>
             <a:endParaRPr lang="en-US"/>
           </a:p>
@@ -345,7 +362,7 @@
             <a:fld id="{B6F15528-21DE-4FAA-801E-634DDDAF4B2B}" type="slidenum">
               <a:rPr lang="en-US" smtClean="0"/>
               <a:pPr/>
-              <a:t>‹#›</a:t>
+              <a:t>‹nº›</a:t>
             </a:fld>
             <a:endParaRPr lang="en-US"/>
           </a:p>
@@ -392,10 +409,9 @@
           <a:lstStyle/>
           <a:p>
             <a:r>
-              <a:rPr lang="en-US" smtClean="0"/>
+              <a:rPr lang="en-US"/>
               <a:t>Click to edit Master title style</a:t>
             </a:r>
-            <a:endParaRPr lang="en-US"/>
           </a:p>
         </p:txBody>
       </p:sp>
@@ -416,38 +432,37 @@
           <a:p>
             <a:pPr lvl="0"/>
             <a:r>
-              <a:rPr lang="en-US" smtClean="0"/>
+              <a:rPr lang="en-US"/>
               <a:t>Click to edit Master text styles</a:t>
             </a:r>
           </a:p>
           <a:p>
             <a:pPr lvl="1"/>
             <a:r>
-              <a:rPr lang="en-US" smtClean="0"/>
+              <a:rPr lang="en-US"/>
               <a:t>Second level</a:t>
             </a:r>
           </a:p>
           <a:p>
             <a:pPr lvl="2"/>
             <a:r>
-              <a:rPr lang="en-US" smtClean="0"/>
+              <a:rPr lang="en-US"/>
               <a:t>Third level</a:t>
             </a:r>
           </a:p>
           <a:p>
             <a:pPr lvl="3"/>
             <a:r>
-              <a:rPr lang="en-US" smtClean="0"/>
+              <a:rPr lang="en-US"/>
               <a:t>Fourth level</a:t>
             </a:r>
           </a:p>
           <a:p>
             <a:pPr lvl="4"/>
             <a:r>
-              <a:rPr lang="en-US" smtClean="0"/>
+              <a:rPr lang="en-US"/>
               <a:t>Fifth level</a:t>
             </a:r>
-            <a:endParaRPr lang="en-US"/>
           </a:p>
         </p:txBody>
       </p:sp>
@@ -469,7 +484,7 @@
             <a:fld id="{1D8BD707-D9CF-40AE-B4C6-C98DA3205C09}" type="datetimeFigureOut">
               <a:rPr lang="en-US" smtClean="0"/>
               <a:pPr/>
-              <a:t>8/1/2011</a:t>
+              <a:t>3/18/2026</a:t>
             </a:fld>
             <a:endParaRPr lang="en-US"/>
           </a:p>
@@ -512,7 +527,7 @@
             <a:fld id="{B6F15528-21DE-4FAA-801E-634DDDAF4B2B}" type="slidenum">
               <a:rPr lang="en-US" smtClean="0"/>
               <a:pPr/>
-              <a:t>‹#›</a:t>
+              <a:t>‹nº›</a:t>
             </a:fld>
             <a:endParaRPr lang="en-US"/>
           </a:p>
@@ -564,10 +579,9 @@
           <a:lstStyle/>
           <a:p>
             <a:r>
-              <a:rPr lang="en-US" smtClean="0"/>
+              <a:rPr lang="en-US"/>
               <a:t>Click to edit Master title style</a:t>
             </a:r>
-            <a:endParaRPr lang="en-US"/>
           </a:p>
         </p:txBody>
       </p:sp>
@@ -593,38 +607,37 @@
           <a:p>
             <a:pPr lvl="0"/>
             <a:r>
-              <a:rPr lang="en-US" smtClean="0"/>
+              <a:rPr lang="en-US"/>
               <a:t>Click to edit Master text styles</a:t>
             </a:r>
           </a:p>
           <a:p>
             <a:pPr lvl="1"/>
             <a:r>
-              <a:rPr lang="en-US" smtClean="0"/>
+              <a:rPr lang="en-US"/>
               <a:t>Second level</a:t>
             </a:r>
           </a:p>
           <a:p>
             <a:pPr lvl="2"/>
             <a:r>
-              <a:rPr lang="en-US" smtClean="0"/>
+              <a:rPr lang="en-US"/>
               <a:t>Third level</a:t>
             </a:r>
           </a:p>
           <a:p>
             <a:pPr lvl="3"/>
             <a:r>
-              <a:rPr lang="en-US" smtClean="0"/>
+              <a:rPr lang="en-US"/>
               <a:t>Fourth level</a:t>
             </a:r>
           </a:p>
           <a:p>
             <a:pPr lvl="4"/>
             <a:r>
-              <a:rPr lang="en-US" smtClean="0"/>
+              <a:rPr lang="en-US"/>
               <a:t>Fifth level</a:t>
             </a:r>
-            <a:endParaRPr lang="en-US"/>
           </a:p>
         </p:txBody>
       </p:sp>
@@ -646,7 +659,7 @@
             <a:fld id="{1D8BD707-D9CF-40AE-B4C6-C98DA3205C09}" type="datetimeFigureOut">
               <a:rPr lang="en-US" smtClean="0"/>
               <a:pPr/>
-              <a:t>8/1/2011</a:t>
+              <a:t>3/18/2026</a:t>
             </a:fld>
             <a:endParaRPr lang="en-US"/>
           </a:p>
@@ -689,7 +702,7 @@
             <a:fld id="{B6F15528-21DE-4FAA-801E-634DDDAF4B2B}" type="slidenum">
               <a:rPr lang="en-US" smtClean="0"/>
               <a:pPr/>
-              <a:t>‹#›</a:t>
+              <a:t>‹nº›</a:t>
             </a:fld>
             <a:endParaRPr lang="en-US"/>
           </a:p>
@@ -736,10 +749,9 @@
           <a:lstStyle/>
           <a:p>
             <a:r>
-              <a:rPr lang="en-US" smtClean="0"/>
+              <a:rPr lang="en-US"/>
               <a:t>Click to edit Master title style</a:t>
             </a:r>
-            <a:endParaRPr lang="en-US"/>
           </a:p>
         </p:txBody>
       </p:sp>
@@ -760,38 +772,37 @@
           <a:p>
             <a:pPr lvl="0"/>
             <a:r>
-              <a:rPr lang="en-US" smtClean="0"/>
+              <a:rPr lang="en-US"/>
               <a:t>Click to edit Master text styles</a:t>
             </a:r>
           </a:p>
           <a:p>
             <a:pPr lvl="1"/>
             <a:r>
-              <a:rPr lang="en-US" smtClean="0"/>
+              <a:rPr lang="en-US"/>
               <a:t>Second level</a:t>
             </a:r>
           </a:p>
           <a:p>
             <a:pPr lvl="2"/>
             <a:r>
-              <a:rPr lang="en-US" smtClean="0"/>
+              <a:rPr lang="en-US"/>
               <a:t>Third level</a:t>
             </a:r>
           </a:p>
           <a:p>
             <a:pPr lvl="3"/>
             <a:r>
-              <a:rPr lang="en-US" smtClean="0"/>
+              <a:rPr lang="en-US"/>
               <a:t>Fourth level</a:t>
             </a:r>
           </a:p>
           <a:p>
             <a:pPr lvl="4"/>
             <a:r>
-              <a:rPr lang="en-US" smtClean="0"/>
+              <a:rPr lang="en-US"/>
               <a:t>Fifth level</a:t>
             </a:r>
-            <a:endParaRPr lang="en-US"/>
           </a:p>
         </p:txBody>
       </p:sp>
@@ -813,7 +824,7 @@
             <a:fld id="{1D8BD707-D9CF-40AE-B4C6-C98DA3205C09}" type="datetimeFigureOut">
               <a:rPr lang="en-US" smtClean="0"/>
               <a:pPr/>
-              <a:t>8/1/2011</a:t>
+              <a:t>3/18/2026</a:t>
             </a:fld>
             <a:endParaRPr lang="en-US"/>
           </a:p>
@@ -856,7 +867,7 @@
             <a:fld id="{B6F15528-21DE-4FAA-801E-634DDDAF4B2B}" type="slidenum">
               <a:rPr lang="en-US" smtClean="0"/>
               <a:pPr/>
-              <a:t>‹#›</a:t>
+              <a:t>‹nº›</a:t>
             </a:fld>
             <a:endParaRPr lang="en-US"/>
           </a:p>
@@ -912,10 +923,9 @@
           </a:lstStyle>
           <a:p>
             <a:r>
-              <a:rPr lang="en-US" smtClean="0"/>
+              <a:rPr lang="en-US"/>
               <a:t>Click to edit Master title style</a:t>
             </a:r>
-            <a:endParaRPr lang="en-US"/>
           </a:p>
         </p:txBody>
       </p:sp>
@@ -1032,7 +1042,7 @@
           <a:p>
             <a:pPr lvl="0"/>
             <a:r>
-              <a:rPr lang="en-US" smtClean="0"/>
+              <a:rPr lang="en-US"/>
               <a:t>Click to edit Master text styles</a:t>
             </a:r>
           </a:p>
@@ -1056,7 +1066,7 @@
             <a:fld id="{1D8BD707-D9CF-40AE-B4C6-C98DA3205C09}" type="datetimeFigureOut">
               <a:rPr lang="en-US" smtClean="0"/>
               <a:pPr/>
-              <a:t>8/1/2011</a:t>
+              <a:t>3/18/2026</a:t>
             </a:fld>
             <a:endParaRPr lang="en-US"/>
           </a:p>
@@ -1099,7 +1109,7 @@
             <a:fld id="{B6F15528-21DE-4FAA-801E-634DDDAF4B2B}" type="slidenum">
               <a:rPr lang="en-US" smtClean="0"/>
               <a:pPr/>
-              <a:t>‹#›</a:t>
+              <a:t>‹nº›</a:t>
             </a:fld>
             <a:endParaRPr lang="en-US"/>
           </a:p>
@@ -1146,10 +1156,9 @@
           <a:lstStyle/>
           <a:p>
             <a:r>
-              <a:rPr lang="en-US" smtClean="0"/>
+              <a:rPr lang="en-US"/>
               <a:t>Click to edit Master title style</a:t>
             </a:r>
-            <a:endParaRPr lang="en-US"/>
           </a:p>
         </p:txBody>
       </p:sp>
@@ -1203,38 +1212,37 @@
           <a:p>
             <a:pPr lvl="0"/>
             <a:r>
-              <a:rPr lang="en-US" smtClean="0"/>
+              <a:rPr lang="en-US"/>
               <a:t>Click to edit Master text styles</a:t>
             </a:r>
           </a:p>
           <a:p>
             <a:pPr lvl="1"/>
             <a:r>
-              <a:rPr lang="en-US" smtClean="0"/>
+              <a:rPr lang="en-US"/>
               <a:t>Second level</a:t>
             </a:r>
           </a:p>
           <a:p>
             <a:pPr lvl="2"/>
             <a:r>
-              <a:rPr lang="en-US" smtClean="0"/>
+              <a:rPr lang="en-US"/>
               <a:t>Third level</a:t>
             </a:r>
           </a:p>
           <a:p>
             <a:pPr lvl="3"/>
             <a:r>
-              <a:rPr lang="en-US" smtClean="0"/>
+              <a:rPr lang="en-US"/>
               <a:t>Fourth level</a:t>
             </a:r>
           </a:p>
           <a:p>
             <a:pPr lvl="4"/>
             <a:r>
-              <a:rPr lang="en-US" smtClean="0"/>
+              <a:rPr lang="en-US"/>
               <a:t>Fifth level</a:t>
             </a:r>
-            <a:endParaRPr lang="en-US"/>
           </a:p>
         </p:txBody>
       </p:sp>
@@ -1288,38 +1296,37 @@
           <a:p>
             <a:pPr lvl="0"/>
             <a:r>
-              <a:rPr lang="en-US" smtClean="0"/>
+              <a:rPr lang="en-US"/>
               <a:t>Click to edit Master text styles</a:t>
             </a:r>
           </a:p>
           <a:p>
             <a:pPr lvl="1"/>
             <a:r>
-              <a:rPr lang="en-US" smtClean="0"/>
+              <a:rPr lang="en-US"/>
               <a:t>Second level</a:t>
             </a:r>
           </a:p>
           <a:p>
             <a:pPr lvl="2"/>
             <a:r>
-              <a:rPr lang="en-US" smtClean="0"/>
+              <a:rPr lang="en-US"/>
               <a:t>Third level</a:t>
             </a:r>
           </a:p>
           <a:p>
             <a:pPr lvl="3"/>
             <a:r>
-              <a:rPr lang="en-US" smtClean="0"/>
+              <a:rPr lang="en-US"/>
               <a:t>Fourth level</a:t>
             </a:r>
           </a:p>
           <a:p>
             <a:pPr lvl="4"/>
             <a:r>
-              <a:rPr lang="en-US" smtClean="0"/>
+              <a:rPr lang="en-US"/>
               <a:t>Fifth level</a:t>
             </a:r>
-            <a:endParaRPr lang="en-US"/>
           </a:p>
         </p:txBody>
       </p:sp>
@@ -1341,7 +1348,7 @@
             <a:fld id="{1D8BD707-D9CF-40AE-B4C6-C98DA3205C09}" type="datetimeFigureOut">
               <a:rPr lang="en-US" smtClean="0"/>
               <a:pPr/>
-              <a:t>8/1/2011</a:t>
+              <a:t>3/18/2026</a:t>
             </a:fld>
             <a:endParaRPr lang="en-US"/>
           </a:p>
@@ -1384,7 +1391,7 @@
             <a:fld id="{B6F15528-21DE-4FAA-801E-634DDDAF4B2B}" type="slidenum">
               <a:rPr lang="en-US" smtClean="0"/>
               <a:pPr/>
-              <a:t>‹#›</a:t>
+              <a:t>‹nº›</a:t>
             </a:fld>
             <a:endParaRPr lang="en-US"/>
           </a:p>
@@ -1435,10 +1442,9 @@
           </a:lstStyle>
           <a:p>
             <a:r>
-              <a:rPr lang="en-US" smtClean="0"/>
+              <a:rPr lang="en-US"/>
               <a:t>Click to edit Master title style</a:t>
             </a:r>
-            <a:endParaRPr lang="en-US"/>
           </a:p>
         </p:txBody>
       </p:sp>
@@ -1501,7 +1507,7 @@
           <a:p>
             <a:pPr lvl="0"/>
             <a:r>
-              <a:rPr lang="en-US" smtClean="0"/>
+              <a:rPr lang="en-US"/>
               <a:t>Click to edit Master text styles</a:t>
             </a:r>
           </a:p>
@@ -1557,38 +1563,37 @@
           <a:p>
             <a:pPr lvl="0"/>
             <a:r>
-              <a:rPr lang="en-US" smtClean="0"/>
+              <a:rPr lang="en-US"/>
               <a:t>Click to edit Master text styles</a:t>
             </a:r>
           </a:p>
           <a:p>
             <a:pPr lvl="1"/>
             <a:r>
-              <a:rPr lang="en-US" smtClean="0"/>
+              <a:rPr lang="en-US"/>
               <a:t>Second level</a:t>
             </a:r>
           </a:p>
           <a:p>
             <a:pPr lvl="2"/>
             <a:r>
-              <a:rPr lang="en-US" smtClean="0"/>
+              <a:rPr lang="en-US"/>
               <a:t>Third level</a:t>
             </a:r>
           </a:p>
           <a:p>
             <a:pPr lvl="3"/>
             <a:r>
-              <a:rPr lang="en-US" smtClean="0"/>
+              <a:rPr lang="en-US"/>
               <a:t>Fourth level</a:t>
             </a:r>
           </a:p>
           <a:p>
             <a:pPr lvl="4"/>
             <a:r>
-              <a:rPr lang="en-US" smtClean="0"/>
+              <a:rPr lang="en-US"/>
               <a:t>Fifth level</a:t>
             </a:r>
-            <a:endParaRPr lang="en-US"/>
           </a:p>
         </p:txBody>
       </p:sp>
@@ -1651,7 +1656,7 @@
           <a:p>
             <a:pPr lvl="0"/>
             <a:r>
-              <a:rPr lang="en-US" smtClean="0"/>
+              <a:rPr lang="en-US"/>
               <a:t>Click to edit Master text styles</a:t>
             </a:r>
           </a:p>
@@ -1707,38 +1712,37 @@
           <a:p>
             <a:pPr lvl="0"/>
             <a:r>
-              <a:rPr lang="en-US" smtClean="0"/>
+              <a:rPr lang="en-US"/>
               <a:t>Click to edit Master text styles</a:t>
             </a:r>
           </a:p>
           <a:p>
             <a:pPr lvl="1"/>
             <a:r>
-              <a:rPr lang="en-US" smtClean="0"/>
+              <a:rPr lang="en-US"/>
               <a:t>Second level</a:t>
             </a:r>
           </a:p>
           <a:p>
             <a:pPr lvl="2"/>
             <a:r>
-              <a:rPr lang="en-US" smtClean="0"/>
+              <a:rPr lang="en-US"/>
               <a:t>Third level</a:t>
             </a:r>
           </a:p>
           <a:p>
             <a:pPr lvl="3"/>
             <a:r>
-              <a:rPr lang="en-US" smtClean="0"/>
+              <a:rPr lang="en-US"/>
               <a:t>Fourth level</a:t>
             </a:r>
           </a:p>
           <a:p>
             <a:pPr lvl="4"/>
             <a:r>
-              <a:rPr lang="en-US" smtClean="0"/>
+              <a:rPr lang="en-US"/>
               <a:t>Fifth level</a:t>
             </a:r>
-            <a:endParaRPr lang="en-US"/>
           </a:p>
         </p:txBody>
       </p:sp>
@@ -1760,7 +1764,7 @@
             <a:fld id="{1D8BD707-D9CF-40AE-B4C6-C98DA3205C09}" type="datetimeFigureOut">
               <a:rPr lang="en-US" smtClean="0"/>
               <a:pPr/>
-              <a:t>8/1/2011</a:t>
+              <a:t>3/18/2026</a:t>
             </a:fld>
             <a:endParaRPr lang="en-US"/>
           </a:p>
@@ -1803,7 +1807,7 @@
             <a:fld id="{B6F15528-21DE-4FAA-801E-634DDDAF4B2B}" type="slidenum">
               <a:rPr lang="en-US" smtClean="0"/>
               <a:pPr/>
-              <a:t>‹#›</a:t>
+              <a:t>‹nº›</a:t>
             </a:fld>
             <a:endParaRPr lang="en-US"/>
           </a:p>
@@ -1850,10 +1854,9 @@
           <a:lstStyle/>
           <a:p>
             <a:r>
-              <a:rPr lang="en-US" smtClean="0"/>
+              <a:rPr lang="en-US"/>
               <a:t>Click to edit Master title style</a:t>
             </a:r>
-            <a:endParaRPr lang="en-US"/>
           </a:p>
         </p:txBody>
       </p:sp>
@@ -1875,7 +1878,7 @@
             <a:fld id="{1D8BD707-D9CF-40AE-B4C6-C98DA3205C09}" type="datetimeFigureOut">
               <a:rPr lang="en-US" smtClean="0"/>
               <a:pPr/>
-              <a:t>8/1/2011</a:t>
+              <a:t>3/18/2026</a:t>
             </a:fld>
             <a:endParaRPr lang="en-US"/>
           </a:p>
@@ -1918,7 +1921,7 @@
             <a:fld id="{B6F15528-21DE-4FAA-801E-634DDDAF4B2B}" type="slidenum">
               <a:rPr lang="en-US" smtClean="0"/>
               <a:pPr/>
-              <a:t>‹#›</a:t>
+              <a:t>‹nº›</a:t>
             </a:fld>
             <a:endParaRPr lang="en-US"/>
           </a:p>
@@ -1967,7 +1970,7 @@
             <a:fld id="{1D8BD707-D9CF-40AE-B4C6-C98DA3205C09}" type="datetimeFigureOut">
               <a:rPr lang="en-US" smtClean="0"/>
               <a:pPr/>
-              <a:t>8/1/2011</a:t>
+              <a:t>3/18/2026</a:t>
             </a:fld>
             <a:endParaRPr lang="en-US"/>
           </a:p>
@@ -2010,7 +2013,7 @@
             <a:fld id="{B6F15528-21DE-4FAA-801E-634DDDAF4B2B}" type="slidenum">
               <a:rPr lang="en-US" smtClean="0"/>
               <a:pPr/>
-              <a:t>‹#›</a:t>
+              <a:t>‹nº›</a:t>
             </a:fld>
             <a:endParaRPr lang="en-US"/>
           </a:p>
@@ -2066,10 +2069,9 @@
           </a:lstStyle>
           <a:p>
             <a:r>
-              <a:rPr lang="en-US" smtClean="0"/>
+              <a:rPr lang="en-US"/>
               <a:t>Click to edit Master title style</a:t>
             </a:r>
-            <a:endParaRPr lang="en-US"/>
           </a:p>
         </p:txBody>
       </p:sp>
@@ -2123,38 +2125,37 @@
           <a:p>
             <a:pPr lvl="0"/>
             <a:r>
-              <a:rPr lang="en-US" smtClean="0"/>
+              <a:rPr lang="en-US"/>
               <a:t>Click to edit Master text styles</a:t>
             </a:r>
           </a:p>
           <a:p>
             <a:pPr lvl="1"/>
             <a:r>
-              <a:rPr lang="en-US" smtClean="0"/>
+              <a:rPr lang="en-US"/>
               <a:t>Second level</a:t>
             </a:r>
           </a:p>
           <a:p>
             <a:pPr lvl="2"/>
             <a:r>
-              <a:rPr lang="en-US" smtClean="0"/>
+              <a:rPr lang="en-US"/>
               <a:t>Third level</a:t>
             </a:r>
           </a:p>
           <a:p>
             <a:pPr lvl="3"/>
             <a:r>
-              <a:rPr lang="en-US" smtClean="0"/>
+              <a:rPr lang="en-US"/>
               <a:t>Fourth level</a:t>
             </a:r>
           </a:p>
           <a:p>
             <a:pPr lvl="4"/>
             <a:r>
-              <a:rPr lang="en-US" smtClean="0"/>
+              <a:rPr lang="en-US"/>
               <a:t>Fifth level</a:t>
             </a:r>
-            <a:endParaRPr lang="en-US"/>
           </a:p>
         </p:txBody>
       </p:sp>
@@ -2217,7 +2218,7 @@
           <a:p>
             <a:pPr lvl="0"/>
             <a:r>
-              <a:rPr lang="en-US" smtClean="0"/>
+              <a:rPr lang="en-US"/>
               <a:t>Click to edit Master text styles</a:t>
             </a:r>
           </a:p>
@@ -2241,7 +2242,7 @@
             <a:fld id="{1D8BD707-D9CF-40AE-B4C6-C98DA3205C09}" type="datetimeFigureOut">
               <a:rPr lang="en-US" smtClean="0"/>
               <a:pPr/>
-              <a:t>8/1/2011</a:t>
+              <a:t>3/18/2026</a:t>
             </a:fld>
             <a:endParaRPr lang="en-US"/>
           </a:p>
@@ -2284,7 +2285,7 @@
             <a:fld id="{B6F15528-21DE-4FAA-801E-634DDDAF4B2B}" type="slidenum">
               <a:rPr lang="en-US" smtClean="0"/>
               <a:pPr/>
-              <a:t>‹#›</a:t>
+              <a:t>‹nº›</a:t>
             </a:fld>
             <a:endParaRPr lang="en-US"/>
           </a:p>
@@ -2340,10 +2341,9 @@
           </a:lstStyle>
           <a:p>
             <a:r>
-              <a:rPr lang="en-US" smtClean="0"/>
+              <a:rPr lang="en-US"/>
               <a:t>Click to edit Master title style</a:t>
             </a:r>
-            <a:endParaRPr lang="en-US"/>
           </a:p>
         </p:txBody>
       </p:sp>
@@ -2467,7 +2467,7 @@
           <a:p>
             <a:pPr lvl="0"/>
             <a:r>
-              <a:rPr lang="en-US" smtClean="0"/>
+              <a:rPr lang="en-US"/>
               <a:t>Click to edit Master text styles</a:t>
             </a:r>
           </a:p>
@@ -2491,7 +2491,7 @@
             <a:fld id="{1D8BD707-D9CF-40AE-B4C6-C98DA3205C09}" type="datetimeFigureOut">
               <a:rPr lang="en-US" smtClean="0"/>
               <a:pPr/>
-              <a:t>8/1/2011</a:t>
+              <a:t>3/18/2026</a:t>
             </a:fld>
             <a:endParaRPr lang="en-US"/>
           </a:p>
@@ -2534,7 +2534,7 @@
             <a:fld id="{B6F15528-21DE-4FAA-801E-634DDDAF4B2B}" type="slidenum">
               <a:rPr lang="en-US" smtClean="0"/>
               <a:pPr/>
-              <a:t>‹#›</a:t>
+              <a:t>‹nº›</a:t>
             </a:fld>
             <a:endParaRPr lang="en-US"/>
           </a:p>
@@ -2596,10 +2596,9 @@
           <a:lstStyle/>
           <a:p>
             <a:r>
-              <a:rPr lang="en-US" smtClean="0"/>
+              <a:rPr lang="en-US"/>
               <a:t>Click to edit Master title style</a:t>
             </a:r>
-            <a:endParaRPr lang="en-US"/>
           </a:p>
         </p:txBody>
       </p:sp>
@@ -2630,38 +2629,37 @@
           <a:p>
             <a:pPr lvl="0"/>
             <a:r>
-              <a:rPr lang="en-US" smtClean="0"/>
+              <a:rPr lang="en-US"/>
               <a:t>Click to edit Master text styles</a:t>
             </a:r>
           </a:p>
           <a:p>
             <a:pPr lvl="1"/>
             <a:r>
-              <a:rPr lang="en-US" smtClean="0"/>
+              <a:rPr lang="en-US"/>
               <a:t>Second level</a:t>
             </a:r>
           </a:p>
           <a:p>
             <a:pPr lvl="2"/>
             <a:r>
-              <a:rPr lang="en-US" smtClean="0"/>
+              <a:rPr lang="en-US"/>
               <a:t>Third level</a:t>
             </a:r>
           </a:p>
           <a:p>
             <a:pPr lvl="3"/>
             <a:r>
-              <a:rPr lang="en-US" smtClean="0"/>
+              <a:rPr lang="en-US"/>
               <a:t>Fourth level</a:t>
             </a:r>
           </a:p>
           <a:p>
             <a:pPr lvl="4"/>
             <a:r>
-              <a:rPr lang="en-US" smtClean="0"/>
+              <a:rPr lang="en-US"/>
               <a:t>Fifth level</a:t>
             </a:r>
-            <a:endParaRPr lang="en-US"/>
           </a:p>
         </p:txBody>
       </p:sp>
@@ -2701,7 +2699,7 @@
             <a:fld id="{1D8BD707-D9CF-40AE-B4C6-C98DA3205C09}" type="datetimeFigureOut">
               <a:rPr lang="en-US" smtClean="0"/>
               <a:pPr/>
-              <a:t>8/1/2011</a:t>
+              <a:t>3/18/2026</a:t>
             </a:fld>
             <a:endParaRPr lang="en-US"/>
           </a:p>
@@ -2780,7 +2778,7 @@
             <a:fld id="{B6F15528-21DE-4FAA-801E-634DDDAF4B2B}" type="slidenum">
               <a:rPr lang="en-US" smtClean="0"/>
               <a:pPr/>
-              <a:t>‹#›</a:t>
+              <a:t>‹nº›</a:t>
             </a:fld>
             <a:endParaRPr lang="en-US"/>
           </a:p>
@@ -3056,7 +3054,7 @@
 </file>
 
 <file path=ppt/slides/slide1.xml><?xml version="1.0" encoding="utf-8"?>
-<p:sld xmlns:p="http://schemas.openxmlformats.org/presentationml/2006/main" xmlns:a="http://schemas.openxmlformats.org/drawingml/2006/main" xmlns:r="http://schemas.openxmlformats.org/officeDocument/2006/relationships">
+<p:sld xmlns:a="http://schemas.openxmlformats.org/drawingml/2006/main" xmlns:r="http://schemas.openxmlformats.org/officeDocument/2006/relationships" xmlns:p="http://schemas.openxmlformats.org/presentationml/2006/main">
   <p:cSld>
     <p:spTree>
       <p:nvGrpSpPr>
@@ -3074,12 +3072,12 @@
       </p:grpSpPr>
       <p:sp>
         <p:nvSpPr>
-          <p:cNvPr name="Freeform 2" id="2"/>
+          <p:cNvPr id="2" name="Freeform 2"/>
           <p:cNvSpPr/>
           <p:nvPr/>
         </p:nvSpPr>
         <p:spPr>
-          <a:xfrm flipH="false" flipV="false" rot="0">
+          <a:xfrm>
             <a:off x="0" y="0"/>
             <a:ext cx="18288000" cy="10287000"/>
           </a:xfrm>
@@ -3088,9 +3086,9 @@
             <a:gdLst/>
             <a:ahLst/>
             <a:cxnLst/>
-            <a:rect r="r" b="b" t="t" l="l"/>
+            <a:rect l="l" t="t" r="r" b="b"/>
             <a:pathLst>
-              <a:path h="10287000" w="18288000">
+              <a:path w="18288000" h="10287000">
                 <a:moveTo>
                   <a:pt x="0" y="0"/>
                 </a:moveTo>
@@ -3113,19 +3111,19 @@
           <a:blipFill>
             <a:blip r:embed="rId2"/>
             <a:stretch>
-              <a:fillRect l="0" t="0" r="0" b="0"/>
+              <a:fillRect/>
             </a:stretch>
           </a:blipFill>
         </p:spPr>
       </p:sp>
       <p:sp>
         <p:nvSpPr>
-          <p:cNvPr name="Freeform 3" id="3"/>
+          <p:cNvPr id="3" name="Freeform 3"/>
           <p:cNvSpPr/>
           <p:nvPr/>
         </p:nvSpPr>
         <p:spPr>
-          <a:xfrm flipH="false" flipV="false" rot="5400000">
+          <a:xfrm rot="5400000">
             <a:off x="1597291" y="108481"/>
             <a:ext cx="2977619" cy="4114800"/>
           </a:xfrm>
@@ -3134,9 +3132,9 @@
             <a:gdLst/>
             <a:ahLst/>
             <a:cxnLst/>
-            <a:rect r="r" b="b" t="t" l="l"/>
+            <a:rect l="l" t="t" r="r" b="b"/>
             <a:pathLst>
-              <a:path h="4114800" w="2977619">
+              <a:path w="2977619" h="4114800">
                 <a:moveTo>
                   <a:pt x="0" y="0"/>
                 </a:moveTo>
@@ -3165,7 +3163,7 @@
               </a:extLst>
             </a:blip>
             <a:stretch>
-              <a:fillRect l="0" t="0" r="0" b="0"/>
+              <a:fillRect/>
             </a:stretch>
           </a:blipFill>
           <a:ln cap="sq">
@@ -3177,12 +3175,12 @@
       </p:sp>
       <p:sp>
         <p:nvSpPr>
-          <p:cNvPr name="Freeform 4" id="4"/>
+          <p:cNvPr id="4" name="Freeform 4"/>
           <p:cNvSpPr/>
           <p:nvPr/>
         </p:nvSpPr>
         <p:spPr>
-          <a:xfrm flipH="false" flipV="false" rot="5400000">
+          <a:xfrm rot="5400000">
             <a:off x="13716570" y="108481"/>
             <a:ext cx="2977619" cy="4114800"/>
           </a:xfrm>
@@ -3191,9 +3189,9 @@
             <a:gdLst/>
             <a:ahLst/>
             <a:cxnLst/>
-            <a:rect r="r" b="b" t="t" l="l"/>
+            <a:rect l="l" t="t" r="r" b="b"/>
             <a:pathLst>
-              <a:path h="4114800" w="2977619">
+              <a:path w="2977619" h="4114800">
                 <a:moveTo>
                   <a:pt x="0" y="0"/>
                 </a:moveTo>
@@ -3222,7 +3220,7 @@
               </a:extLst>
             </a:blip>
             <a:stretch>
-              <a:fillRect l="0" t="0" r="0" b="0"/>
+              <a:fillRect/>
             </a:stretch>
           </a:blipFill>
           <a:ln cap="sq">
@@ -3234,12 +3232,12 @@
       </p:sp>
       <p:sp>
         <p:nvSpPr>
-          <p:cNvPr name="Freeform 5" id="5"/>
+          <p:cNvPr id="5" name="Freeform 5"/>
           <p:cNvSpPr/>
           <p:nvPr/>
         </p:nvSpPr>
         <p:spPr>
-          <a:xfrm flipH="false" flipV="false" rot="5400000">
+          <a:xfrm rot="5400000">
             <a:off x="1597291" y="3086100"/>
             <a:ext cx="2977619" cy="4114800"/>
           </a:xfrm>
@@ -3248,9 +3246,9 @@
             <a:gdLst/>
             <a:ahLst/>
             <a:cxnLst/>
-            <a:rect r="r" b="b" t="t" l="l"/>
+            <a:rect l="l" t="t" r="r" b="b"/>
             <a:pathLst>
-              <a:path h="4114800" w="2977619">
+              <a:path w="2977619" h="4114800">
                 <a:moveTo>
                   <a:pt x="0" y="0"/>
                 </a:moveTo>
@@ -3279,7 +3277,7 @@
               </a:extLst>
             </a:blip>
             <a:stretch>
-              <a:fillRect l="0" t="0" r="0" b="0"/>
+              <a:fillRect/>
             </a:stretch>
           </a:blipFill>
           <a:ln cap="sq">
@@ -3291,12 +3289,12 @@
       </p:sp>
       <p:sp>
         <p:nvSpPr>
-          <p:cNvPr name="Freeform 6" id="6"/>
+          <p:cNvPr id="6" name="Freeform 6"/>
           <p:cNvSpPr/>
           <p:nvPr/>
         </p:nvSpPr>
         <p:spPr>
-          <a:xfrm flipH="false" flipV="false" rot="5400000">
+          <a:xfrm rot="5400000">
             <a:off x="13716570" y="3086100"/>
             <a:ext cx="2977619" cy="4114800"/>
           </a:xfrm>
@@ -3305,9 +3303,9 @@
             <a:gdLst/>
             <a:ahLst/>
             <a:cxnLst/>
-            <a:rect r="r" b="b" t="t" l="l"/>
+            <a:rect l="l" t="t" r="r" b="b"/>
             <a:pathLst>
-              <a:path h="4114800" w="2977619">
+              <a:path w="2977619" h="4114800">
                 <a:moveTo>
                   <a:pt x="0" y="0"/>
                 </a:moveTo>
@@ -3336,7 +3334,7 @@
               </a:extLst>
             </a:blip>
             <a:stretch>
-              <a:fillRect l="0" t="0" r="0" b="0"/>
+              <a:fillRect/>
             </a:stretch>
           </a:blipFill>
           <a:ln cap="sq">
@@ -3348,12 +3346,12 @@
       </p:sp>
       <p:sp>
         <p:nvSpPr>
-          <p:cNvPr name="Freeform 7" id="7"/>
+          <p:cNvPr id="7" name="Freeform 7"/>
           <p:cNvSpPr/>
           <p:nvPr/>
         </p:nvSpPr>
         <p:spPr>
-          <a:xfrm flipH="false" flipV="false" rot="5400000">
+          <a:xfrm rot="5400000">
             <a:off x="1597291" y="6063719"/>
             <a:ext cx="2977619" cy="4114800"/>
           </a:xfrm>
@@ -3362,9 +3360,9 @@
             <a:gdLst/>
             <a:ahLst/>
             <a:cxnLst/>
-            <a:rect r="r" b="b" t="t" l="l"/>
+            <a:rect l="l" t="t" r="r" b="b"/>
             <a:pathLst>
-              <a:path h="4114800" w="2977619">
+              <a:path w="2977619" h="4114800">
                 <a:moveTo>
                   <a:pt x="0" y="0"/>
                 </a:moveTo>
@@ -3393,7 +3391,7 @@
               </a:extLst>
             </a:blip>
             <a:stretch>
-              <a:fillRect l="0" t="0" r="0" b="0"/>
+              <a:fillRect/>
             </a:stretch>
           </a:blipFill>
           <a:ln cap="sq">
@@ -3405,12 +3403,12 @@
       </p:sp>
       <p:sp>
         <p:nvSpPr>
-          <p:cNvPr name="Freeform 8" id="8"/>
+          <p:cNvPr id="8" name="Freeform 8"/>
           <p:cNvSpPr/>
           <p:nvPr/>
         </p:nvSpPr>
         <p:spPr>
-          <a:xfrm flipH="false" flipV="false" rot="5400000">
+          <a:xfrm rot="5400000">
             <a:off x="13716570" y="6063719"/>
             <a:ext cx="2977619" cy="4114800"/>
           </a:xfrm>
@@ -3419,9 +3417,9 @@
             <a:gdLst/>
             <a:ahLst/>
             <a:cxnLst/>
-            <a:rect r="r" b="b" t="t" l="l"/>
+            <a:rect l="l" t="t" r="r" b="b"/>
             <a:pathLst>
-              <a:path h="4114800" w="2977619">
+              <a:path w="2977619" h="4114800">
                 <a:moveTo>
                   <a:pt x="0" y="0"/>
                 </a:moveTo>
@@ -3450,7 +3448,7 @@
               </a:extLst>
             </a:blip>
             <a:stretch>
-              <a:fillRect l="0" t="0" r="0" b="0"/>
+              <a:fillRect/>
             </a:stretch>
           </a:blipFill>
           <a:ln cap="sq">
@@ -3462,12 +3460,12 @@
       </p:sp>
       <p:sp>
         <p:nvSpPr>
-          <p:cNvPr name="Freeform 9" id="9"/>
+          <p:cNvPr id="9" name="Freeform 9"/>
           <p:cNvSpPr/>
           <p:nvPr/>
         </p:nvSpPr>
         <p:spPr>
-          <a:xfrm flipH="true" flipV="false" rot="0">
+          <a:xfrm flipH="1">
             <a:off x="5077724" y="2479763"/>
             <a:ext cx="1434503" cy="394703"/>
           </a:xfrm>
@@ -3476,9 +3474,9 @@
             <a:gdLst/>
             <a:ahLst/>
             <a:cxnLst/>
-            <a:rect r="r" b="b" t="t" l="l"/>
+            <a:rect l="l" t="t" r="r" b="b"/>
             <a:pathLst>
-              <a:path h="394703" w="1434503">
+              <a:path w="1434503" h="394703">
                 <a:moveTo>
                   <a:pt x="1434502" y="0"/>
                 </a:moveTo>
@@ -3507,19 +3505,19 @@
               </a:extLst>
             </a:blip>
             <a:stretch>
-              <a:fillRect l="0" t="0" r="0" b="0"/>
+              <a:fillRect/>
             </a:stretch>
           </a:blipFill>
         </p:spPr>
       </p:sp>
       <p:sp>
         <p:nvSpPr>
-          <p:cNvPr name="Freeform 10" id="10"/>
+          <p:cNvPr id="10" name="Freeform 10"/>
           <p:cNvSpPr/>
           <p:nvPr/>
         </p:nvSpPr>
         <p:spPr>
-          <a:xfrm flipH="true" flipV="false" rot="-10800000">
+          <a:xfrm rot="-10800000" flipH="1">
             <a:off x="11839536" y="7639081"/>
             <a:ext cx="1434503" cy="394703"/>
           </a:xfrm>
@@ -3528,9 +3526,9 @@
             <a:gdLst/>
             <a:ahLst/>
             <a:cxnLst/>
-            <a:rect r="r" b="b" t="t" l="l"/>
+            <a:rect l="l" t="t" r="r" b="b"/>
             <a:pathLst>
-              <a:path h="394703" w="1434503">
+              <a:path w="1434503" h="394703">
                 <a:moveTo>
                   <a:pt x="1434503" y="0"/>
                 </a:moveTo>
@@ -3559,19 +3557,19 @@
               </a:extLst>
             </a:blip>
             <a:stretch>
-              <a:fillRect l="0" t="0" r="0" b="0"/>
+              <a:fillRect/>
             </a:stretch>
           </a:blipFill>
         </p:spPr>
       </p:sp>
       <p:sp>
         <p:nvSpPr>
-          <p:cNvPr name="Freeform 11" id="11"/>
+          <p:cNvPr id="11" name="Freeform 11"/>
           <p:cNvSpPr/>
           <p:nvPr/>
         </p:nvSpPr>
         <p:spPr>
-          <a:xfrm flipH="true" flipV="true" rot="0">
+          <a:xfrm flipH="1" flipV="1">
             <a:off x="5077724" y="7639081"/>
             <a:ext cx="1434503" cy="394703"/>
           </a:xfrm>
@@ -3580,9 +3578,9 @@
             <a:gdLst/>
             <a:ahLst/>
             <a:cxnLst/>
-            <a:rect r="r" b="b" t="t" l="l"/>
+            <a:rect l="l" t="t" r="r" b="b"/>
             <a:pathLst>
-              <a:path h="394703" w="1434503">
+              <a:path w="1434503" h="394703">
                 <a:moveTo>
                   <a:pt x="1434502" y="394703"/>
                 </a:moveTo>
@@ -3611,19 +3609,19 @@
               </a:extLst>
             </a:blip>
             <a:stretch>
-              <a:fillRect l="0" t="0" r="0" b="0"/>
+              <a:fillRect/>
             </a:stretch>
           </a:blipFill>
         </p:spPr>
       </p:sp>
       <p:sp>
         <p:nvSpPr>
-          <p:cNvPr name="Freeform 12" id="12"/>
+          <p:cNvPr id="12" name="Freeform 12"/>
           <p:cNvSpPr/>
           <p:nvPr/>
         </p:nvSpPr>
         <p:spPr>
-          <a:xfrm flipH="true" flipV="true" rot="-10800000">
+          <a:xfrm rot="-10800000" flipH="1" flipV="1">
             <a:off x="11839536" y="2479763"/>
             <a:ext cx="1434503" cy="394703"/>
           </a:xfrm>
@@ -3632,9 +3630,9 @@
             <a:gdLst/>
             <a:ahLst/>
             <a:cxnLst/>
-            <a:rect r="r" b="b" t="t" l="l"/>
+            <a:rect l="l" t="t" r="r" b="b"/>
             <a:pathLst>
-              <a:path h="394703" w="1434503">
+              <a:path w="1434503" h="394703">
                 <a:moveTo>
                   <a:pt x="1434503" y="394703"/>
                 </a:moveTo>
@@ -3663,19 +3661,19 @@
               </a:extLst>
             </a:blip>
             <a:stretch>
-              <a:fillRect l="0" t="0" r="0" b="0"/>
+              <a:fillRect/>
             </a:stretch>
           </a:blipFill>
         </p:spPr>
       </p:sp>
       <p:sp>
         <p:nvSpPr>
-          <p:cNvPr name="Freeform 13" id="13"/>
+          <p:cNvPr id="13" name="Freeform 13"/>
           <p:cNvSpPr/>
           <p:nvPr/>
         </p:nvSpPr>
         <p:spPr>
-          <a:xfrm flipH="true" flipV="true" rot="697682">
+          <a:xfrm rot="697682" flipH="1" flipV="1">
             <a:off x="5077724" y="4893243"/>
             <a:ext cx="1434503" cy="394703"/>
           </a:xfrm>
@@ -3684,9 +3682,9 @@
             <a:gdLst/>
             <a:ahLst/>
             <a:cxnLst/>
-            <a:rect r="r" b="b" t="t" l="l"/>
+            <a:rect l="l" t="t" r="r" b="b"/>
             <a:pathLst>
-              <a:path h="394703" w="1434503">
+              <a:path w="1434503" h="394703">
                 <a:moveTo>
                   <a:pt x="1434502" y="394703"/>
                 </a:moveTo>
@@ -3715,19 +3713,19 @@
               </a:extLst>
             </a:blip>
             <a:stretch>
-              <a:fillRect l="0" t="0" r="0" b="0"/>
+              <a:fillRect/>
             </a:stretch>
           </a:blipFill>
         </p:spPr>
       </p:sp>
       <p:sp>
         <p:nvSpPr>
-          <p:cNvPr name="Freeform 14" id="14"/>
+          <p:cNvPr id="14" name="Freeform 14"/>
           <p:cNvSpPr/>
           <p:nvPr/>
         </p:nvSpPr>
         <p:spPr>
-          <a:xfrm flipH="true" flipV="true" rot="-10102317">
+          <a:xfrm rot="-10102317" flipH="1" flipV="1">
             <a:off x="11839536" y="4893243"/>
             <a:ext cx="1434503" cy="394703"/>
           </a:xfrm>
@@ -3736,9 +3734,9 @@
             <a:gdLst/>
             <a:ahLst/>
             <a:cxnLst/>
-            <a:rect r="r" b="b" t="t" l="l"/>
+            <a:rect l="l" t="t" r="r" b="b"/>
             <a:pathLst>
-              <a:path h="394703" w="1434503">
+              <a:path w="1434503" h="394703">
                 <a:moveTo>
                   <a:pt x="1434503" y="394703"/>
                 </a:moveTo>
@@ -3767,19 +3765,19 @@
               </a:extLst>
             </a:blip>
             <a:stretch>
-              <a:fillRect l="0" t="0" r="0" b="0"/>
+              <a:fillRect/>
             </a:stretch>
           </a:blipFill>
         </p:spPr>
       </p:sp>
       <p:sp>
         <p:nvSpPr>
-          <p:cNvPr name="Freeform 15" id="15"/>
+          <p:cNvPr id="15" name="Freeform 15"/>
           <p:cNvSpPr/>
           <p:nvPr/>
         </p:nvSpPr>
         <p:spPr>
-          <a:xfrm flipH="false" flipV="false" rot="0">
+          <a:xfrm>
             <a:off x="6458158" y="1028700"/>
             <a:ext cx="5371684" cy="8229600"/>
           </a:xfrm>
@@ -3788,9 +3786,9 @@
             <a:gdLst/>
             <a:ahLst/>
             <a:cxnLst/>
-            <a:rect r="r" b="b" t="t" l="l"/>
+            <a:rect l="l" t="t" r="r" b="b"/>
             <a:pathLst>
-              <a:path h="8229600" w="5371684">
+              <a:path w="5371684" h="8229600">
                 <a:moveTo>
                   <a:pt x="0" y="0"/>
                 </a:moveTo>
@@ -3819,19 +3817,19 @@
               </a:extLst>
             </a:blip>
             <a:stretch>
-              <a:fillRect l="0" t="0" r="0" b="0"/>
+              <a:fillRect/>
             </a:stretch>
           </a:blipFill>
         </p:spPr>
       </p:sp>
       <p:sp>
         <p:nvSpPr>
-          <p:cNvPr name="Freeform 16" id="16"/>
+          <p:cNvPr id="16" name="Freeform 16"/>
           <p:cNvSpPr/>
           <p:nvPr/>
         </p:nvSpPr>
         <p:spPr>
-          <a:xfrm flipH="false" flipV="false" rot="-2787714">
+          <a:xfrm rot="-2787714">
             <a:off x="7270836" y="2699368"/>
             <a:ext cx="713549" cy="649978"/>
           </a:xfrm>
@@ -3840,9 +3838,9 @@
             <a:gdLst/>
             <a:ahLst/>
             <a:cxnLst/>
-            <a:rect r="r" b="b" t="t" l="l"/>
+            <a:rect l="l" t="t" r="r" b="b"/>
             <a:pathLst>
-              <a:path h="649978" w="713549">
+              <a:path w="713549" h="649978">
                 <a:moveTo>
                   <a:pt x="0" y="0"/>
                 </a:moveTo>
@@ -3871,19 +3869,19 @@
               </a:extLst>
             </a:blip>
             <a:stretch>
-              <a:fillRect l="0" t="0" r="0" b="0"/>
+              <a:fillRect/>
             </a:stretch>
           </a:blipFill>
         </p:spPr>
       </p:sp>
       <p:sp>
         <p:nvSpPr>
-          <p:cNvPr name="Freeform 17" id="17"/>
+          <p:cNvPr id="17" name="Freeform 17"/>
           <p:cNvSpPr/>
           <p:nvPr/>
         </p:nvSpPr>
         <p:spPr>
-          <a:xfrm flipH="false" flipV="false" rot="7917325">
+          <a:xfrm rot="7917325">
             <a:off x="10300405" y="2699368"/>
             <a:ext cx="713549" cy="649978"/>
           </a:xfrm>
@@ -3892,9 +3890,9 @@
             <a:gdLst/>
             <a:ahLst/>
             <a:cxnLst/>
-            <a:rect r="r" b="b" t="t" l="l"/>
+            <a:rect l="l" t="t" r="r" b="b"/>
             <a:pathLst>
-              <a:path h="649978" w="713549">
+              <a:path w="713549" h="649978">
                 <a:moveTo>
                   <a:pt x="0" y="0"/>
                 </a:moveTo>
@@ -3923,45 +3921,45 @@
               </a:extLst>
             </a:blip>
             <a:stretch>
-              <a:fillRect l="0" t="0" r="0" b="0"/>
+              <a:fillRect/>
             </a:stretch>
           </a:blipFill>
         </p:spPr>
       </p:sp>
       <p:sp>
         <p:nvSpPr>
-          <p:cNvPr name="TextBox 18" id="18"/>
-          <p:cNvSpPr txBox="true"/>
-          <p:nvPr/>
-        </p:nvSpPr>
-        <p:spPr>
-          <a:xfrm rot="0">
+          <p:cNvPr id="18" name="TextBox 18"/>
+          <p:cNvSpPr txBox="1"/>
+          <p:nvPr/>
+        </p:nvSpPr>
+        <p:spPr>
+          <a:xfrm>
             <a:off x="6843235" y="4096914"/>
-            <a:ext cx="4403570" cy="1983597"/>
+            <a:ext cx="4403570" cy="1834028"/>
           </a:xfrm>
           <a:prstGeom prst="rect">
             <a:avLst/>
           </a:prstGeom>
         </p:spPr>
         <p:txBody>
-          <a:bodyPr anchor="t" rtlCol="false" tIns="0" lIns="0" bIns="0" rIns="0">
+          <a:bodyPr lIns="0" tIns="0" rIns="0" bIns="0" rtlCol="0" anchor="t">
             <a:spAutoFit/>
           </a:bodyPr>
           <a:lstStyle/>
           <a:p>
-            <a:pPr algn="ctr" marL="0" indent="0" lvl="0">
+            <a:pPr marL="0" lvl="0" indent="0" algn="ctr">
               <a:lnSpc>
                 <a:spcPts val="7612"/>
               </a:lnSpc>
             </a:pPr>
             <a:r>
-              <a:rPr lang="en-US" sz="7848">
+              <a:rPr lang="en-US" sz="4400" dirty="0">
                 <a:solidFill>
                   <a:srgbClr val="000000"/>
                 </a:solidFill>
-                <a:latin typeface="Handy Casual"/>
+                <a:latin typeface="Arial" panose="020B0604020202020204" pitchFamily="34" charset="0"/>
                 <a:ea typeface="Handy Casual"/>
-                <a:cs typeface="Handy Casual"/>
+                <a:cs typeface="Arial" panose="020B0604020202020204" pitchFamily="34" charset="0"/>
                 <a:sym typeface="Handy Casual"/>
               </a:rPr>
               <a:t>DATABASE ORGANIZATION</a:t>
@@ -3971,12 +3969,12 @@
       </p:sp>
       <p:sp>
         <p:nvSpPr>
-          <p:cNvPr name="TextBox 19" id="19"/>
-          <p:cNvSpPr txBox="true"/>
-          <p:nvPr/>
-        </p:nvSpPr>
-        <p:spPr>
-          <a:xfrm rot="0">
+          <p:cNvPr id="19" name="TextBox 19"/>
+          <p:cNvSpPr txBox="1"/>
+          <p:nvPr/>
+        </p:nvSpPr>
+        <p:spPr>
+          <a:xfrm>
             <a:off x="7037985" y="6677713"/>
             <a:ext cx="4208819" cy="572246"/>
           </a:xfrm>
@@ -3985,24 +3983,24 @@
           </a:prstGeom>
         </p:spPr>
         <p:txBody>
-          <a:bodyPr anchor="t" rtlCol="false" tIns="0" lIns="0" bIns="0" rIns="0">
+          <a:bodyPr lIns="0" tIns="0" rIns="0" bIns="0" rtlCol="0" anchor="t">
             <a:spAutoFit/>
           </a:bodyPr>
           <a:lstStyle/>
           <a:p>
-            <a:pPr algn="ctr" marL="0" indent="0" lvl="0">
+            <a:pPr marL="0" lvl="0" indent="0" algn="ctr">
               <a:lnSpc>
                 <a:spcPts val="4664"/>
               </a:lnSpc>
             </a:pPr>
             <a:r>
-              <a:rPr lang="en-US" sz="3481">
+              <a:rPr lang="en-US" sz="3481" dirty="0">
                 <a:solidFill>
                   <a:srgbClr val="000000"/>
                 </a:solidFill>
-                <a:latin typeface="Gloria Hallelujah"/>
+                <a:latin typeface="Arial" panose="020B0604020202020204" pitchFamily="34" charset="0"/>
                 <a:ea typeface="Gloria Hallelujah"/>
-                <a:cs typeface="Gloria Hallelujah"/>
+                <a:cs typeface="Arial" panose="020B0604020202020204" pitchFamily="34" charset="0"/>
                 <a:sym typeface="Gloria Hallelujah"/>
               </a:rPr>
               <a:t>Key Components</a:t>
@@ -4012,38 +4010,38 @@
       </p:sp>
       <p:sp>
         <p:nvSpPr>
-          <p:cNvPr name="TextBox 20" id="20"/>
-          <p:cNvSpPr txBox="true"/>
-          <p:nvPr/>
-        </p:nvSpPr>
-        <p:spPr>
-          <a:xfrm rot="0">
+          <p:cNvPr id="20" name="TextBox 20"/>
+          <p:cNvSpPr txBox="1"/>
+          <p:nvPr/>
+        </p:nvSpPr>
+        <p:spPr>
+          <a:xfrm>
             <a:off x="7627611" y="2709737"/>
-            <a:ext cx="3029569" cy="581659"/>
+            <a:ext cx="3029569" cy="554511"/>
           </a:xfrm>
           <a:prstGeom prst="rect">
             <a:avLst/>
           </a:prstGeom>
         </p:spPr>
         <p:txBody>
-          <a:bodyPr anchor="t" rtlCol="false" tIns="0" lIns="0" bIns="0" rIns="0">
+          <a:bodyPr lIns="0" tIns="0" rIns="0" bIns="0" rtlCol="0" anchor="t">
             <a:spAutoFit/>
           </a:bodyPr>
           <a:lstStyle/>
           <a:p>
-            <a:pPr algn="ctr" marL="0" indent="0" lvl="0">
+            <a:pPr marL="0" lvl="0" indent="0" algn="ctr">
               <a:lnSpc>
                 <a:spcPts val="4707"/>
               </a:lnSpc>
             </a:pPr>
             <a:r>
-              <a:rPr lang="en-US" sz="3512">
+              <a:rPr lang="en-US" sz="3512" dirty="0">
                 <a:solidFill>
                   <a:srgbClr val="000000"/>
                 </a:solidFill>
-                <a:latin typeface="Handy Casual"/>
+                <a:latin typeface="Arial" panose="020B0604020202020204" pitchFamily="34" charset="0"/>
                 <a:ea typeface="Handy Casual"/>
-                <a:cs typeface="Handy Casual"/>
+                <a:cs typeface="Arial" panose="020B0604020202020204" pitchFamily="34" charset="0"/>
                 <a:sym typeface="Handy Casual"/>
               </a:rPr>
               <a:t>OVERVIEW</a:t>
@@ -4053,26 +4051,26 @@
       </p:sp>
       <p:sp>
         <p:nvSpPr>
-          <p:cNvPr name="TextBox 21" id="21"/>
-          <p:cNvSpPr txBox="true"/>
-          <p:nvPr/>
-        </p:nvSpPr>
-        <p:spPr>
-          <a:xfrm rot="0">
+          <p:cNvPr id="21" name="TextBox 21"/>
+          <p:cNvSpPr txBox="1"/>
+          <p:nvPr/>
+        </p:nvSpPr>
+        <p:spPr>
+          <a:xfrm>
             <a:off x="1443307" y="1806777"/>
-            <a:ext cx="3285585" cy="736621"/>
+            <a:ext cx="3285585" cy="705321"/>
           </a:xfrm>
           <a:prstGeom prst="rect">
             <a:avLst/>
           </a:prstGeom>
         </p:spPr>
         <p:txBody>
-          <a:bodyPr anchor="t" rtlCol="false" tIns="0" lIns="0" bIns="0" rIns="0">
+          <a:bodyPr lIns="0" tIns="0" rIns="0" bIns="0" rtlCol="0" anchor="t">
             <a:spAutoFit/>
           </a:bodyPr>
           <a:lstStyle/>
           <a:p>
-            <a:pPr algn="ctr" marL="0" indent="0" lvl="0">
+            <a:pPr marL="0" lvl="0" indent="0" algn="ctr">
               <a:lnSpc>
                 <a:spcPts val="5483"/>
               </a:lnSpc>
@@ -4081,13 +4079,13 @@
               </a:spcBef>
             </a:pPr>
             <a:r>
-              <a:rPr lang="en-US" sz="5652" strike="noStrike" u="none">
+              <a:rPr lang="en-US" sz="5652" u="none" strike="noStrike" dirty="0">
                 <a:solidFill>
                   <a:srgbClr val="000000"/>
                 </a:solidFill>
-                <a:latin typeface="Handy Casual"/>
+                <a:latin typeface="Arial" panose="020B0604020202020204" pitchFamily="34" charset="0"/>
                 <a:ea typeface="Handy Casual"/>
-                <a:cs typeface="Handy Casual"/>
+                <a:cs typeface="Arial" panose="020B0604020202020204" pitchFamily="34" charset="0"/>
                 <a:sym typeface="Handy Casual"/>
               </a:rPr>
               <a:t>TABLES</a:t>
@@ -4097,26 +4095,26 @@
       </p:sp>
       <p:sp>
         <p:nvSpPr>
-          <p:cNvPr name="TextBox 22" id="22"/>
-          <p:cNvSpPr txBox="true"/>
-          <p:nvPr/>
-        </p:nvSpPr>
-        <p:spPr>
-          <a:xfrm rot="0">
+          <p:cNvPr id="22" name="TextBox 22"/>
+          <p:cNvSpPr txBox="1"/>
+          <p:nvPr/>
+        </p:nvSpPr>
+        <p:spPr>
+          <a:xfrm>
             <a:off x="13562587" y="1806777"/>
-            <a:ext cx="3285585" cy="736621"/>
+            <a:ext cx="3285585" cy="657424"/>
           </a:xfrm>
           <a:prstGeom prst="rect">
             <a:avLst/>
           </a:prstGeom>
         </p:spPr>
         <p:txBody>
-          <a:bodyPr anchor="t" rtlCol="false" tIns="0" lIns="0" bIns="0" rIns="0">
+          <a:bodyPr lIns="0" tIns="0" rIns="0" bIns="0" rtlCol="0" anchor="t">
             <a:spAutoFit/>
           </a:bodyPr>
           <a:lstStyle/>
           <a:p>
-            <a:pPr algn="ctr" marL="0" indent="0" lvl="0">
+            <a:pPr marL="0" lvl="0" indent="0" algn="ctr">
               <a:lnSpc>
                 <a:spcPts val="5483"/>
               </a:lnSpc>
@@ -4125,13 +4123,13 @@
               </a:spcBef>
             </a:pPr>
             <a:r>
-              <a:rPr lang="en-US" sz="5652">
+              <a:rPr lang="en-US" sz="4400" dirty="0">
                 <a:solidFill>
                   <a:srgbClr val="000000"/>
                 </a:solidFill>
-                <a:latin typeface="Handy Casual"/>
+                <a:latin typeface="Arial" panose="020B0604020202020204" pitchFamily="34" charset="0"/>
                 <a:ea typeface="Handy Casual"/>
-                <a:cs typeface="Handy Casual"/>
+                <a:cs typeface="Arial" panose="020B0604020202020204" pitchFamily="34" charset="0"/>
                 <a:sym typeface="Handy Casual"/>
               </a:rPr>
               <a:t>RECORDS</a:t>
@@ -4141,26 +4139,26 @@
       </p:sp>
       <p:sp>
         <p:nvSpPr>
-          <p:cNvPr name="TextBox 23" id="23"/>
-          <p:cNvSpPr txBox="true"/>
-          <p:nvPr/>
-        </p:nvSpPr>
-        <p:spPr>
-          <a:xfrm rot="0">
+          <p:cNvPr id="23" name="TextBox 23"/>
+          <p:cNvSpPr txBox="1"/>
+          <p:nvPr/>
+        </p:nvSpPr>
+        <p:spPr>
+          <a:xfrm>
             <a:off x="13562587" y="4837102"/>
-            <a:ext cx="3285585" cy="736621"/>
+            <a:ext cx="3285585" cy="705321"/>
           </a:xfrm>
           <a:prstGeom prst="rect">
             <a:avLst/>
           </a:prstGeom>
         </p:spPr>
         <p:txBody>
-          <a:bodyPr anchor="t" rtlCol="false" tIns="0" lIns="0" bIns="0" rIns="0">
+          <a:bodyPr lIns="0" tIns="0" rIns="0" bIns="0" rtlCol="0" anchor="t">
             <a:spAutoFit/>
           </a:bodyPr>
           <a:lstStyle/>
           <a:p>
-            <a:pPr algn="ctr" marL="0" indent="0" lvl="0">
+            <a:pPr marL="0" lvl="0" indent="0" algn="ctr">
               <a:lnSpc>
                 <a:spcPts val="5483"/>
               </a:lnSpc>
@@ -4169,13 +4167,13 @@
               </a:spcBef>
             </a:pPr>
             <a:r>
-              <a:rPr lang="en-US" sz="5652">
+              <a:rPr lang="en-US" sz="5652" dirty="0">
                 <a:solidFill>
                   <a:srgbClr val="000000"/>
                 </a:solidFill>
-                <a:latin typeface="Handy Casual"/>
+                <a:latin typeface="Arial" panose="020B0604020202020204" pitchFamily="34" charset="0"/>
                 <a:ea typeface="Handy Casual"/>
-                <a:cs typeface="Handy Casual"/>
+                <a:cs typeface="Arial" panose="020B0604020202020204" pitchFamily="34" charset="0"/>
                 <a:sym typeface="Handy Casual"/>
               </a:rPr>
               <a:t>FIELDS</a:t>
@@ -4185,38 +4183,38 @@
       </p:sp>
       <p:sp>
         <p:nvSpPr>
-          <p:cNvPr name="TextBox 24" id="24"/>
-          <p:cNvSpPr txBox="true"/>
-          <p:nvPr/>
-        </p:nvSpPr>
-        <p:spPr>
-          <a:xfrm rot="0">
+          <p:cNvPr id="24" name="TextBox 24"/>
+          <p:cNvSpPr txBox="1"/>
+          <p:nvPr/>
+        </p:nvSpPr>
+        <p:spPr>
+          <a:xfrm>
             <a:off x="1443307" y="4837102"/>
-            <a:ext cx="3285585" cy="736621"/>
+            <a:ext cx="3285585" cy="705321"/>
           </a:xfrm>
           <a:prstGeom prst="rect">
             <a:avLst/>
           </a:prstGeom>
         </p:spPr>
         <p:txBody>
-          <a:bodyPr anchor="t" rtlCol="false" tIns="0" lIns="0" bIns="0" rIns="0">
+          <a:bodyPr lIns="0" tIns="0" rIns="0" bIns="0" rtlCol="0" anchor="t">
             <a:spAutoFit/>
           </a:bodyPr>
           <a:lstStyle/>
           <a:p>
-            <a:pPr algn="ctr" marL="0" indent="0" lvl="0">
+            <a:pPr marL="0" lvl="0" indent="0" algn="ctr">
               <a:lnSpc>
                 <a:spcPts val="5483"/>
               </a:lnSpc>
             </a:pPr>
             <a:r>
-              <a:rPr lang="en-US" sz="5652">
+              <a:rPr lang="en-US" sz="5652" dirty="0">
                 <a:solidFill>
                   <a:srgbClr val="000000"/>
                 </a:solidFill>
-                <a:latin typeface="Handy Casual"/>
+                <a:latin typeface="Arial" panose="020B0604020202020204" pitchFamily="34" charset="0"/>
                 <a:ea typeface="Handy Casual"/>
-                <a:cs typeface="Handy Casual"/>
+                <a:cs typeface="Arial" panose="020B0604020202020204" pitchFamily="34" charset="0"/>
                 <a:sym typeface="Handy Casual"/>
               </a:rPr>
               <a:t>KEYS</a:t>
@@ -4226,38 +4224,38 @@
       </p:sp>
       <p:sp>
         <p:nvSpPr>
-          <p:cNvPr name="TextBox 25" id="25"/>
-          <p:cNvSpPr txBox="true"/>
-          <p:nvPr/>
-        </p:nvSpPr>
-        <p:spPr>
-          <a:xfrm rot="0">
+          <p:cNvPr id="25" name="TextBox 25"/>
+          <p:cNvSpPr txBox="1"/>
+          <p:nvPr/>
+        </p:nvSpPr>
+        <p:spPr>
+          <a:xfrm>
             <a:off x="1443307" y="7814721"/>
-            <a:ext cx="3285585" cy="736621"/>
+            <a:ext cx="3285585" cy="705321"/>
           </a:xfrm>
           <a:prstGeom prst="rect">
             <a:avLst/>
           </a:prstGeom>
         </p:spPr>
         <p:txBody>
-          <a:bodyPr anchor="t" rtlCol="false" tIns="0" lIns="0" bIns="0" rIns="0">
+          <a:bodyPr lIns="0" tIns="0" rIns="0" bIns="0" rtlCol="0" anchor="t">
             <a:spAutoFit/>
           </a:bodyPr>
           <a:lstStyle/>
           <a:p>
-            <a:pPr algn="ctr" marL="0" indent="0" lvl="0">
+            <a:pPr marL="0" lvl="0" indent="0" algn="ctr">
               <a:lnSpc>
                 <a:spcPts val="5483"/>
               </a:lnSpc>
             </a:pPr>
             <a:r>
-              <a:rPr lang="en-US" sz="5652">
+              <a:rPr lang="en-US" sz="5652" dirty="0">
                 <a:solidFill>
                   <a:srgbClr val="000000"/>
                 </a:solidFill>
-                <a:latin typeface="Handy Casual"/>
+                <a:latin typeface="Arial" panose="020B0604020202020204" pitchFamily="34" charset="0"/>
                 <a:ea typeface="Handy Casual"/>
-                <a:cs typeface="Handy Casual"/>
+                <a:cs typeface="Arial" panose="020B0604020202020204" pitchFamily="34" charset="0"/>
                 <a:sym typeface="Handy Casual"/>
               </a:rPr>
               <a:t>INDEXES</a:t>
@@ -4267,38 +4265,38 @@
       </p:sp>
       <p:sp>
         <p:nvSpPr>
-          <p:cNvPr name="TextBox 26" id="26"/>
-          <p:cNvSpPr txBox="true"/>
-          <p:nvPr/>
-        </p:nvSpPr>
-        <p:spPr>
-          <a:xfrm rot="0">
+          <p:cNvPr id="26" name="TextBox 26"/>
+          <p:cNvSpPr txBox="1"/>
+          <p:nvPr/>
+        </p:nvSpPr>
+        <p:spPr>
+          <a:xfrm>
             <a:off x="13570374" y="7839709"/>
-            <a:ext cx="3285585" cy="677120"/>
+            <a:ext cx="3285585" cy="583942"/>
           </a:xfrm>
           <a:prstGeom prst="rect">
             <a:avLst/>
           </a:prstGeom>
         </p:spPr>
         <p:txBody>
-          <a:bodyPr anchor="t" rtlCol="false" tIns="0" lIns="0" bIns="0" rIns="0">
+          <a:bodyPr lIns="0" tIns="0" rIns="0" bIns="0" rtlCol="0" anchor="t">
             <a:spAutoFit/>
           </a:bodyPr>
           <a:lstStyle/>
           <a:p>
-            <a:pPr algn="ctr" marL="0" indent="0" lvl="0">
+            <a:pPr marL="0" lvl="0" indent="0" algn="ctr">
               <a:lnSpc>
                 <a:spcPts val="5088"/>
               </a:lnSpc>
             </a:pPr>
             <a:r>
-              <a:rPr lang="en-US" sz="5246">
+              <a:rPr lang="en-US" sz="3200" dirty="0">
                 <a:solidFill>
                   <a:srgbClr val="000000"/>
                 </a:solidFill>
-                <a:latin typeface="Handy Casual"/>
+                <a:latin typeface="Arial" panose="020B0604020202020204" pitchFamily="34" charset="0"/>
                 <a:ea typeface="Handy Casual"/>
-                <a:cs typeface="Handy Casual"/>
+                <a:cs typeface="Arial" panose="020B0604020202020204" pitchFamily="34" charset="0"/>
                 <a:sym typeface="Handy Casual"/>
               </a:rPr>
               <a:t>RELATIONSHIPS</a:t>
@@ -4315,7 +4313,7 @@
 </file>
 
 <file path=ppt/slides/slide2.xml><?xml version="1.0" encoding="utf-8"?>
-<p:sld xmlns:p="http://schemas.openxmlformats.org/presentationml/2006/main" xmlns:a="http://schemas.openxmlformats.org/drawingml/2006/main" xmlns:r="http://schemas.openxmlformats.org/officeDocument/2006/relationships">
+<p:sld xmlns:a="http://schemas.openxmlformats.org/drawingml/2006/main" xmlns:r="http://schemas.openxmlformats.org/officeDocument/2006/relationships" xmlns:p="http://schemas.openxmlformats.org/presentationml/2006/main">
   <p:cSld>
     <p:spTree>
       <p:nvGrpSpPr>
@@ -4333,34 +4331,34 @@
       </p:grpSpPr>
       <p:sp>
         <p:nvSpPr>
-          <p:cNvPr name="Freeform 2" id="2"/>
+          <p:cNvPr id="3" name="Freeform 3"/>
           <p:cNvSpPr/>
           <p:nvPr/>
         </p:nvSpPr>
         <p:spPr>
-          <a:xfrm flipH="false" flipV="false" rot="0">
-            <a:off x="0" y="0"/>
-            <a:ext cx="18288000" cy="10287000"/>
+          <a:xfrm>
+            <a:off x="2739203" y="3508163"/>
+            <a:ext cx="3215103" cy="4702943"/>
           </a:xfrm>
           <a:custGeom>
             <a:avLst/>
             <a:gdLst/>
             <a:ahLst/>
             <a:cxnLst/>
-            <a:rect r="r" b="b" t="t" l="l"/>
+            <a:rect l="l" t="t" r="r" b="b"/>
             <a:pathLst>
-              <a:path h="10287000" w="18288000">
+              <a:path w="3215103" h="4702943">
                 <a:moveTo>
                   <a:pt x="0" y="0"/>
                 </a:moveTo>
                 <a:lnTo>
-                  <a:pt x="18288000" y="0"/>
-                </a:lnTo>
-                <a:lnTo>
-                  <a:pt x="18288000" y="10287000"/>
-                </a:lnTo>
-                <a:lnTo>
-                  <a:pt x="0" y="10287000"/>
+                  <a:pt x="3215102" y="0"/>
+                </a:lnTo>
+                <a:lnTo>
+                  <a:pt x="3215102" y="4702943"/>
+                </a:lnTo>
+                <a:lnTo>
+                  <a:pt x="0" y="4702943"/>
                 </a:lnTo>
                 <a:lnTo>
                   <a:pt x="0" y="0"/>
@@ -4370,61 +4368,15 @@
             </a:pathLst>
           </a:custGeom>
           <a:blipFill>
-            <a:blip r:embed="rId2"/>
-            <a:stretch>
-              <a:fillRect l="0" t="0" r="0" b="0"/>
-            </a:stretch>
-          </a:blipFill>
-        </p:spPr>
-      </p:sp>
-      <p:sp>
-        <p:nvSpPr>
-          <p:cNvPr name="Freeform 3" id="3"/>
-          <p:cNvSpPr/>
-          <p:nvPr/>
-        </p:nvSpPr>
-        <p:spPr>
-          <a:xfrm flipH="false" flipV="false" rot="0">
-            <a:off x="792590" y="3466241"/>
-            <a:ext cx="3215103" cy="4702943"/>
-          </a:xfrm>
-          <a:custGeom>
-            <a:avLst/>
-            <a:gdLst/>
-            <a:ahLst/>
-            <a:cxnLst/>
-            <a:rect r="r" b="b" t="t" l="l"/>
-            <a:pathLst>
-              <a:path h="4702943" w="3215103">
-                <a:moveTo>
-                  <a:pt x="0" y="0"/>
-                </a:moveTo>
-                <a:lnTo>
-                  <a:pt x="3215102" y="0"/>
-                </a:lnTo>
-                <a:lnTo>
-                  <a:pt x="3215102" y="4702943"/>
-                </a:lnTo>
-                <a:lnTo>
-                  <a:pt x="0" y="4702943"/>
-                </a:lnTo>
-                <a:lnTo>
-                  <a:pt x="0" y="0"/>
-                </a:lnTo>
-                <a:close/>
-              </a:path>
-            </a:pathLst>
-          </a:custGeom>
-          <a:blipFill>
-            <a:blip r:embed="rId3">
+            <a:blip r:embed="rId2">
               <a:extLst>
                 <a:ext uri="{96DAC541-7B7A-43D3-8B79-37D633B846F1}">
-                  <asvg:svgBlip xmlns:asvg="http://schemas.microsoft.com/office/drawing/2016/SVG/main" r:embed="rId4"/>
+                  <asvg:svgBlip xmlns:asvg="http://schemas.microsoft.com/office/drawing/2016/SVG/main" r:embed="rId3"/>
                 </a:ext>
               </a:extLst>
             </a:blip>
             <a:stretch>
-              <a:fillRect l="0" t="0" r="0" b="0"/>
+              <a:fillRect/>
             </a:stretch>
           </a:blipFill>
           <a:ln cap="sq">
@@ -4436,13 +4388,13 @@
       </p:sp>
       <p:sp>
         <p:nvSpPr>
-          <p:cNvPr name="Freeform 4" id="4"/>
+          <p:cNvPr id="4" name="Freeform 4"/>
           <p:cNvSpPr/>
           <p:nvPr/>
         </p:nvSpPr>
         <p:spPr>
-          <a:xfrm flipH="false" flipV="true" rot="-586675">
-            <a:off x="6363812" y="8127417"/>
+          <a:xfrm rot="-586675" flipV="1">
+            <a:off x="8310425" y="8169339"/>
             <a:ext cx="2031620" cy="543214"/>
           </a:xfrm>
           <a:custGeom>
@@ -4450,9 +4402,9 @@
             <a:gdLst/>
             <a:ahLst/>
             <a:cxnLst/>
-            <a:rect r="r" b="b" t="t" l="l"/>
+            <a:rect l="l" t="t" r="r" b="b"/>
             <a:pathLst>
-              <a:path h="543214" w="2031620">
+              <a:path w="2031620" h="543214">
                 <a:moveTo>
                   <a:pt x="0" y="543214"/>
                 </a:moveTo>
@@ -4473,28 +4425,28 @@
             </a:pathLst>
           </a:custGeom>
           <a:blipFill>
-            <a:blip r:embed="rId5">
+            <a:blip r:embed="rId4">
               <a:extLst>
                 <a:ext uri="{96DAC541-7B7A-43D3-8B79-37D633B846F1}">
-                  <asvg:svgBlip xmlns:asvg="http://schemas.microsoft.com/office/drawing/2016/SVG/main" r:embed="rId6"/>
+                  <asvg:svgBlip xmlns:asvg="http://schemas.microsoft.com/office/drawing/2016/SVG/main" r:embed="rId5"/>
                 </a:ext>
               </a:extLst>
             </a:blip>
             <a:stretch>
-              <a:fillRect l="0" t="0" r="0" b="0"/>
+              <a:fillRect/>
             </a:stretch>
           </a:blipFill>
         </p:spPr>
       </p:sp>
       <p:sp>
         <p:nvSpPr>
-          <p:cNvPr name="Freeform 5" id="5"/>
+          <p:cNvPr id="5" name="Freeform 5"/>
           <p:cNvSpPr/>
           <p:nvPr/>
         </p:nvSpPr>
         <p:spPr>
-          <a:xfrm flipH="false" flipV="false" rot="0">
-            <a:off x="4164519" y="3466241"/>
+          <a:xfrm>
+            <a:off x="6111132" y="3508163"/>
             <a:ext cx="3215103" cy="4702943"/>
           </a:xfrm>
           <a:custGeom>
@@ -4502,9 +4454,9 @@
             <a:gdLst/>
             <a:ahLst/>
             <a:cxnLst/>
-            <a:rect r="r" b="b" t="t" l="l"/>
+            <a:rect l="l" t="t" r="r" b="b"/>
             <a:pathLst>
-              <a:path h="4702943" w="3215103">
+              <a:path w="3215103" h="4702943">
                 <a:moveTo>
                   <a:pt x="0" y="0"/>
                 </a:moveTo>
@@ -4525,15 +4477,15 @@
             </a:pathLst>
           </a:custGeom>
           <a:blipFill>
-            <a:blip r:embed="rId7">
+            <a:blip r:embed="rId6">
               <a:extLst>
                 <a:ext uri="{96DAC541-7B7A-43D3-8B79-37D633B846F1}">
-                  <asvg:svgBlip xmlns:asvg="http://schemas.microsoft.com/office/drawing/2016/SVG/main" r:embed="rId8"/>
+                  <asvg:svgBlip xmlns:asvg="http://schemas.microsoft.com/office/drawing/2016/SVG/main" r:embed="rId7"/>
                 </a:ext>
               </a:extLst>
             </a:blip>
             <a:stretch>
-              <a:fillRect l="0" t="0" r="0" b="0"/>
+              <a:fillRect/>
             </a:stretch>
           </a:blipFill>
           <a:ln cap="sq">
@@ -4545,13 +4497,13 @@
       </p:sp>
       <p:sp>
         <p:nvSpPr>
-          <p:cNvPr name="TextBox 6" id="6"/>
-          <p:cNvSpPr txBox="true"/>
-          <p:nvPr/>
-        </p:nvSpPr>
-        <p:spPr>
-          <a:xfrm rot="0">
-            <a:off x="792590" y="8613950"/>
+          <p:cNvPr id="6" name="TextBox 6"/>
+          <p:cNvSpPr txBox="1"/>
+          <p:nvPr/>
+        </p:nvSpPr>
+        <p:spPr>
+          <a:xfrm>
+            <a:off x="2739203" y="8655872"/>
             <a:ext cx="3215103" cy="644312"/>
           </a:xfrm>
           <a:prstGeom prst="rect">
@@ -4559,12 +4511,12 @@
           </a:prstGeom>
         </p:spPr>
         <p:txBody>
-          <a:bodyPr anchor="t" rtlCol="false" tIns="0" lIns="0" bIns="0" rIns="0">
+          <a:bodyPr lIns="0" tIns="0" rIns="0" bIns="0" rtlCol="0" anchor="t">
             <a:spAutoFit/>
           </a:bodyPr>
           <a:lstStyle/>
           <a:p>
-            <a:pPr algn="ctr" marL="0" indent="0" lvl="0">
+            <a:pPr marL="0" lvl="0" indent="0" algn="ctr">
               <a:lnSpc>
                 <a:spcPts val="5221"/>
               </a:lnSpc>
@@ -4589,13 +4541,13 @@
       </p:sp>
       <p:sp>
         <p:nvSpPr>
-          <p:cNvPr name="TextBox 7" id="7"/>
-          <p:cNvSpPr txBox="true"/>
-          <p:nvPr/>
-        </p:nvSpPr>
-        <p:spPr>
-          <a:xfrm rot="0">
-            <a:off x="4164519" y="8613895"/>
+          <p:cNvPr id="7" name="TextBox 7"/>
+          <p:cNvSpPr txBox="1"/>
+          <p:nvPr/>
+        </p:nvSpPr>
+        <p:spPr>
+          <a:xfrm>
+            <a:off x="6111132" y="8655817"/>
             <a:ext cx="3215103" cy="644423"/>
           </a:xfrm>
           <a:prstGeom prst="rect">
@@ -4603,12 +4555,12 @@
           </a:prstGeom>
         </p:spPr>
         <p:txBody>
-          <a:bodyPr anchor="t" rtlCol="false" tIns="0" lIns="0" bIns="0" rIns="0">
+          <a:bodyPr lIns="0" tIns="0" rIns="0" bIns="0" rtlCol="0" anchor="t">
             <a:spAutoFit/>
           </a:bodyPr>
           <a:lstStyle/>
           <a:p>
-            <a:pPr algn="ctr" marL="0" indent="0" lvl="0">
+            <a:pPr marL="0" lvl="0" indent="0" algn="ctr">
               <a:lnSpc>
                 <a:spcPts val="5210"/>
               </a:lnSpc>
@@ -4633,13 +4585,13 @@
       </p:sp>
       <p:sp>
         <p:nvSpPr>
-          <p:cNvPr name="TextBox 8" id="8"/>
-          <p:cNvSpPr txBox="true"/>
-          <p:nvPr/>
-        </p:nvSpPr>
-        <p:spPr>
-          <a:xfrm rot="0">
-            <a:off x="7536449" y="8613895"/>
+          <p:cNvPr id="8" name="TextBox 8"/>
+          <p:cNvSpPr txBox="1"/>
+          <p:nvPr/>
+        </p:nvSpPr>
+        <p:spPr>
+          <a:xfrm>
+            <a:off x="9483062" y="8655817"/>
             <a:ext cx="3215103" cy="644423"/>
           </a:xfrm>
           <a:prstGeom prst="rect">
@@ -4647,12 +4599,12 @@
           </a:prstGeom>
         </p:spPr>
         <p:txBody>
-          <a:bodyPr anchor="t" rtlCol="false" tIns="0" lIns="0" bIns="0" rIns="0">
+          <a:bodyPr lIns="0" tIns="0" rIns="0" bIns="0" rtlCol="0" anchor="t">
             <a:spAutoFit/>
           </a:bodyPr>
           <a:lstStyle/>
           <a:p>
-            <a:pPr algn="ctr" marL="0" indent="0" lvl="0">
+            <a:pPr marL="0" lvl="0" indent="0" algn="ctr">
               <a:lnSpc>
                 <a:spcPts val="5210"/>
               </a:lnSpc>
@@ -4677,13 +4629,13 @@
       </p:sp>
       <p:sp>
         <p:nvSpPr>
-          <p:cNvPr name="TextBox 9" id="9"/>
-          <p:cNvSpPr txBox="true"/>
-          <p:nvPr/>
-        </p:nvSpPr>
-        <p:spPr>
-          <a:xfrm rot="0">
-            <a:off x="10908378" y="8613895"/>
+          <p:cNvPr id="9" name="TextBox 9"/>
+          <p:cNvSpPr txBox="1"/>
+          <p:nvPr/>
+        </p:nvSpPr>
+        <p:spPr>
+          <a:xfrm>
+            <a:off x="12854991" y="8655817"/>
             <a:ext cx="3215103" cy="644423"/>
           </a:xfrm>
           <a:prstGeom prst="rect">
@@ -4691,12 +4643,12 @@
           </a:prstGeom>
         </p:spPr>
         <p:txBody>
-          <a:bodyPr anchor="t" rtlCol="false" tIns="0" lIns="0" bIns="0" rIns="0">
+          <a:bodyPr lIns="0" tIns="0" rIns="0" bIns="0" rtlCol="0" anchor="t">
             <a:spAutoFit/>
           </a:bodyPr>
           <a:lstStyle/>
           <a:p>
-            <a:pPr algn="ctr" marL="0" indent="0" lvl="0">
+            <a:pPr marL="0" lvl="0" indent="0" algn="ctr">
               <a:lnSpc>
                 <a:spcPts val="5210"/>
               </a:lnSpc>
@@ -4721,13 +4673,13 @@
       </p:sp>
       <p:sp>
         <p:nvSpPr>
-          <p:cNvPr name="Freeform 10" id="10"/>
+          <p:cNvPr id="10" name="Freeform 10"/>
           <p:cNvSpPr/>
           <p:nvPr/>
         </p:nvSpPr>
         <p:spPr>
-          <a:xfrm flipH="false" flipV="false" rot="0">
-            <a:off x="7536449" y="3466241"/>
+          <a:xfrm>
+            <a:off x="9483062" y="3508163"/>
             <a:ext cx="3215103" cy="4702943"/>
           </a:xfrm>
           <a:custGeom>
@@ -4735,9 +4687,9 @@
             <a:gdLst/>
             <a:ahLst/>
             <a:cxnLst/>
-            <a:rect r="r" b="b" t="t" l="l"/>
+            <a:rect l="l" t="t" r="r" b="b"/>
             <a:pathLst>
-              <a:path h="4702943" w="3215103">
+              <a:path w="3215103" h="4702943">
                 <a:moveTo>
                   <a:pt x="0" y="0"/>
                 </a:moveTo>
@@ -4758,15 +4710,15 @@
             </a:pathLst>
           </a:custGeom>
           <a:blipFill>
-            <a:blip r:embed="rId9">
+            <a:blip r:embed="rId8">
               <a:extLst>
                 <a:ext uri="{96DAC541-7B7A-43D3-8B79-37D633B846F1}">
-                  <asvg:svgBlip xmlns:asvg="http://schemas.microsoft.com/office/drawing/2016/SVG/main" r:embed="rId10"/>
+                  <asvg:svgBlip xmlns:asvg="http://schemas.microsoft.com/office/drawing/2016/SVG/main" r:embed="rId9"/>
                 </a:ext>
               </a:extLst>
             </a:blip>
             <a:stretch>
-              <a:fillRect l="0" t="0" r="0" b="0"/>
+              <a:fillRect/>
             </a:stretch>
           </a:blipFill>
           <a:ln cap="sq">
@@ -4778,13 +4730,13 @@
       </p:sp>
       <p:sp>
         <p:nvSpPr>
-          <p:cNvPr name="Freeform 11" id="11"/>
+          <p:cNvPr id="11" name="Freeform 11"/>
           <p:cNvSpPr/>
           <p:nvPr/>
         </p:nvSpPr>
         <p:spPr>
-          <a:xfrm flipH="false" flipV="false" rot="0">
-            <a:off x="10908378" y="3466241"/>
+          <a:xfrm>
+            <a:off x="12854991" y="3508163"/>
             <a:ext cx="3215103" cy="4702943"/>
           </a:xfrm>
           <a:custGeom>
@@ -4792,9 +4744,9 @@
             <a:gdLst/>
             <a:ahLst/>
             <a:cxnLst/>
-            <a:rect r="r" b="b" t="t" l="l"/>
+            <a:rect l="l" t="t" r="r" b="b"/>
             <a:pathLst>
-              <a:path h="4702943" w="3215103">
+              <a:path w="3215103" h="4702943">
                 <a:moveTo>
                   <a:pt x="0" y="0"/>
                 </a:moveTo>
@@ -4815,15 +4767,15 @@
             </a:pathLst>
           </a:custGeom>
           <a:blipFill>
-            <a:blip r:embed="rId11">
+            <a:blip r:embed="rId10">
               <a:extLst>
                 <a:ext uri="{96DAC541-7B7A-43D3-8B79-37D633B846F1}">
-                  <asvg:svgBlip xmlns:asvg="http://schemas.microsoft.com/office/drawing/2016/SVG/main" r:embed="rId12"/>
+                  <asvg:svgBlip xmlns:asvg="http://schemas.microsoft.com/office/drawing/2016/SVG/main" r:embed="rId11"/>
                 </a:ext>
               </a:extLst>
             </a:blip>
             <a:stretch>
-              <a:fillRect l="0" t="0" r="0" b="0"/>
+              <a:fillRect/>
             </a:stretch>
           </a:blipFill>
           <a:ln cap="sq">
@@ -4835,70 +4787,65 @@
       </p:sp>
       <p:sp>
         <p:nvSpPr>
-          <p:cNvPr name="Freeform 12" id="12"/>
+          <p:cNvPr id="13" name="Freeform 13"/>
           <p:cNvSpPr/>
           <p:nvPr/>
         </p:nvSpPr>
         <p:spPr>
-          <a:xfrm flipH="false" flipV="false" rot="0">
-            <a:off x="14280308" y="3466241"/>
-            <a:ext cx="3215103" cy="4702943"/>
+          <a:xfrm rot="-586675" flipV="1">
+            <a:off x="5093550" y="8169339"/>
+            <a:ext cx="2031620" cy="543214"/>
           </a:xfrm>
           <a:custGeom>
             <a:avLst/>
             <a:gdLst/>
             <a:ahLst/>
             <a:cxnLst/>
-            <a:rect r="r" b="b" t="t" l="l"/>
+            <a:rect l="l" t="t" r="r" b="b"/>
             <a:pathLst>
-              <a:path h="4702943" w="3215103">
+              <a:path w="2031620" h="543214">
                 <a:moveTo>
+                  <a:pt x="0" y="543214"/>
+                </a:moveTo>
+                <a:lnTo>
+                  <a:pt x="2031619" y="543214"/>
+                </a:lnTo>
+                <a:lnTo>
+                  <a:pt x="2031619" y="0"/>
+                </a:lnTo>
+                <a:lnTo>
                   <a:pt x="0" y="0"/>
-                </a:moveTo>
-                <a:lnTo>
-                  <a:pt x="3215102" y="0"/>
-                </a:lnTo>
-                <a:lnTo>
-                  <a:pt x="3215102" y="4702943"/>
-                </a:lnTo>
-                <a:lnTo>
-                  <a:pt x="0" y="4702943"/>
-                </a:lnTo>
-                <a:lnTo>
-                  <a:pt x="0" y="0"/>
+                </a:lnTo>
+                <a:lnTo>
+                  <a:pt x="0" y="543214"/>
                 </a:lnTo>
                 <a:close/>
               </a:path>
             </a:pathLst>
           </a:custGeom>
           <a:blipFill>
-            <a:blip r:embed="rId13">
+            <a:blip r:embed="rId4">
               <a:extLst>
                 <a:ext uri="{96DAC541-7B7A-43D3-8B79-37D633B846F1}">
-                  <asvg:svgBlip xmlns:asvg="http://schemas.microsoft.com/office/drawing/2016/SVG/main" r:embed="rId14"/>
+                  <asvg:svgBlip xmlns:asvg="http://schemas.microsoft.com/office/drawing/2016/SVG/main" r:embed="rId5"/>
                 </a:ext>
               </a:extLst>
             </a:blip>
             <a:stretch>
-              <a:fillRect l="0" t="0" r="0" b="0"/>
+              <a:fillRect/>
             </a:stretch>
           </a:blipFill>
-          <a:ln cap="sq">
-            <a:noFill/>
-            <a:prstDash val="solid"/>
-            <a:miter/>
-          </a:ln>
-        </p:spPr>
-      </p:sp>
-      <p:sp>
-        <p:nvSpPr>
-          <p:cNvPr name="Freeform 13" id="13"/>
+        </p:spPr>
+      </p:sp>
+      <p:sp>
+        <p:nvSpPr>
+          <p:cNvPr id="14" name="Freeform 14"/>
           <p:cNvSpPr/>
           <p:nvPr/>
         </p:nvSpPr>
         <p:spPr>
-          <a:xfrm flipH="false" flipV="true" rot="-586675">
-            <a:off x="3146937" y="8127417"/>
+          <a:xfrm rot="-586675" flipV="1">
+            <a:off x="11682355" y="8169339"/>
             <a:ext cx="2031620" cy="543214"/>
           </a:xfrm>
           <a:custGeom>
@@ -4906,9 +4853,9 @@
             <a:gdLst/>
             <a:ahLst/>
             <a:cxnLst/>
-            <a:rect r="r" b="b" t="t" l="l"/>
+            <a:rect l="l" t="t" r="r" b="b"/>
             <a:pathLst>
-              <a:path h="543214" w="2031620">
+              <a:path w="2031620" h="543214">
                 <a:moveTo>
                   <a:pt x="0" y="543214"/>
                 </a:moveTo>
@@ -4929,132 +4876,28 @@
             </a:pathLst>
           </a:custGeom>
           <a:blipFill>
-            <a:blip r:embed="rId5">
+            <a:blip r:embed="rId4">
               <a:extLst>
                 <a:ext uri="{96DAC541-7B7A-43D3-8B79-37D633B846F1}">
-                  <asvg:svgBlip xmlns:asvg="http://schemas.microsoft.com/office/drawing/2016/SVG/main" r:embed="rId6"/>
+                  <asvg:svgBlip xmlns:asvg="http://schemas.microsoft.com/office/drawing/2016/SVG/main" r:embed="rId5"/>
                 </a:ext>
               </a:extLst>
             </a:blip>
             <a:stretch>
-              <a:fillRect l="0" t="0" r="0" b="0"/>
+              <a:fillRect/>
             </a:stretch>
           </a:blipFill>
         </p:spPr>
       </p:sp>
       <p:sp>
         <p:nvSpPr>
-          <p:cNvPr name="Freeform 14" id="14"/>
-          <p:cNvSpPr/>
-          <p:nvPr/>
-        </p:nvSpPr>
-        <p:spPr>
-          <a:xfrm flipH="false" flipV="true" rot="-586675">
-            <a:off x="9735742" y="8127417"/>
-            <a:ext cx="2031620" cy="543214"/>
-          </a:xfrm>
-          <a:custGeom>
-            <a:avLst/>
-            <a:gdLst/>
-            <a:ahLst/>
-            <a:cxnLst/>
-            <a:rect r="r" b="b" t="t" l="l"/>
-            <a:pathLst>
-              <a:path h="543214" w="2031620">
-                <a:moveTo>
-                  <a:pt x="0" y="543214"/>
-                </a:moveTo>
-                <a:lnTo>
-                  <a:pt x="2031619" y="543214"/>
-                </a:lnTo>
-                <a:lnTo>
-                  <a:pt x="2031619" y="0"/>
-                </a:lnTo>
-                <a:lnTo>
-                  <a:pt x="0" y="0"/>
-                </a:lnTo>
-                <a:lnTo>
-                  <a:pt x="0" y="543214"/>
-                </a:lnTo>
-                <a:close/>
-              </a:path>
-            </a:pathLst>
-          </a:custGeom>
-          <a:blipFill>
-            <a:blip r:embed="rId5">
-              <a:extLst>
-                <a:ext uri="{96DAC541-7B7A-43D3-8B79-37D633B846F1}">
-                  <asvg:svgBlip xmlns:asvg="http://schemas.microsoft.com/office/drawing/2016/SVG/main" r:embed="rId6"/>
-                </a:ext>
-              </a:extLst>
-            </a:blip>
-            <a:stretch>
-              <a:fillRect l="0" t="0" r="0" b="0"/>
-            </a:stretch>
-          </a:blipFill>
-        </p:spPr>
-      </p:sp>
-      <p:sp>
-        <p:nvSpPr>
-          <p:cNvPr name="Freeform 15" id="15"/>
-          <p:cNvSpPr/>
-          <p:nvPr/>
-        </p:nvSpPr>
-        <p:spPr>
-          <a:xfrm flipH="false" flipV="true" rot="-586675">
-            <a:off x="13107671" y="8127417"/>
-            <a:ext cx="2031620" cy="543214"/>
-          </a:xfrm>
-          <a:custGeom>
-            <a:avLst/>
-            <a:gdLst/>
-            <a:ahLst/>
-            <a:cxnLst/>
-            <a:rect r="r" b="b" t="t" l="l"/>
-            <a:pathLst>
-              <a:path h="543214" w="2031620">
-                <a:moveTo>
-                  <a:pt x="0" y="543214"/>
-                </a:moveTo>
-                <a:lnTo>
-                  <a:pt x="2031620" y="543214"/>
-                </a:lnTo>
-                <a:lnTo>
-                  <a:pt x="2031620" y="0"/>
-                </a:lnTo>
-                <a:lnTo>
-                  <a:pt x="0" y="0"/>
-                </a:lnTo>
-                <a:lnTo>
-                  <a:pt x="0" y="543214"/>
-                </a:lnTo>
-                <a:close/>
-              </a:path>
-            </a:pathLst>
-          </a:custGeom>
-          <a:blipFill>
-            <a:blip r:embed="rId5">
-              <a:extLst>
-                <a:ext uri="{96DAC541-7B7A-43D3-8B79-37D633B846F1}">
-                  <asvg:svgBlip xmlns:asvg="http://schemas.microsoft.com/office/drawing/2016/SVG/main" r:embed="rId6"/>
-                </a:ext>
-              </a:extLst>
-            </a:blip>
-            <a:stretch>
-              <a:fillRect l="0" t="0" r="0" b="0"/>
-            </a:stretch>
-          </a:blipFill>
-        </p:spPr>
-      </p:sp>
-      <p:sp>
-        <p:nvSpPr>
-          <p:cNvPr name="TextBox 16" id="16"/>
-          <p:cNvSpPr txBox="true"/>
-          <p:nvPr/>
-        </p:nvSpPr>
-        <p:spPr>
-          <a:xfrm rot="0">
-            <a:off x="792590" y="2588416"/>
+          <p:cNvPr id="16" name="TextBox 16"/>
+          <p:cNvSpPr txBox="1"/>
+          <p:nvPr/>
+        </p:nvSpPr>
+        <p:spPr>
+          <a:xfrm>
+            <a:off x="2739203" y="2630338"/>
             <a:ext cx="3215103" cy="644312"/>
           </a:xfrm>
           <a:prstGeom prst="rect">
@@ -5062,12 +4905,12 @@
           </a:prstGeom>
         </p:spPr>
         <p:txBody>
-          <a:bodyPr anchor="t" rtlCol="false" tIns="0" lIns="0" bIns="0" rIns="0">
+          <a:bodyPr lIns="0" tIns="0" rIns="0" bIns="0" rtlCol="0" anchor="t">
             <a:spAutoFit/>
           </a:bodyPr>
           <a:lstStyle/>
           <a:p>
-            <a:pPr algn="ctr" marL="0" indent="0" lvl="0">
+            <a:pPr marL="0" lvl="0" indent="0" algn="ctr">
               <a:lnSpc>
                 <a:spcPts val="5221"/>
               </a:lnSpc>
@@ -5092,13 +4935,13 @@
       </p:sp>
       <p:sp>
         <p:nvSpPr>
-          <p:cNvPr name="TextBox 17" id="17"/>
-          <p:cNvSpPr txBox="true"/>
-          <p:nvPr/>
-        </p:nvSpPr>
-        <p:spPr>
-          <a:xfrm rot="0">
-            <a:off x="4164519" y="2588361"/>
+          <p:cNvPr id="17" name="TextBox 17"/>
+          <p:cNvSpPr txBox="1"/>
+          <p:nvPr/>
+        </p:nvSpPr>
+        <p:spPr>
+          <a:xfrm>
+            <a:off x="6111132" y="2630283"/>
             <a:ext cx="3215103" cy="644423"/>
           </a:xfrm>
           <a:prstGeom prst="rect">
@@ -5106,12 +4949,12 @@
           </a:prstGeom>
         </p:spPr>
         <p:txBody>
-          <a:bodyPr anchor="t" rtlCol="false" tIns="0" lIns="0" bIns="0" rIns="0">
+          <a:bodyPr lIns="0" tIns="0" rIns="0" bIns="0" rtlCol="0" anchor="t">
             <a:spAutoFit/>
           </a:bodyPr>
           <a:lstStyle/>
           <a:p>
-            <a:pPr algn="ctr" marL="0" indent="0" lvl="0">
+            <a:pPr marL="0" lvl="0" indent="0" algn="ctr">
               <a:lnSpc>
                 <a:spcPts val="5210"/>
               </a:lnSpc>
@@ -5120,7 +4963,7 @@
               </a:spcBef>
             </a:pPr>
             <a:r>
-              <a:rPr lang="en-US" sz="4008" strike="noStrike" u="none">
+              <a:rPr lang="en-US" sz="4008" u="none" strike="noStrike">
                 <a:solidFill>
                   <a:srgbClr val="000000"/>
                 </a:solidFill>
@@ -5136,13 +4979,13 @@
       </p:sp>
       <p:sp>
         <p:nvSpPr>
-          <p:cNvPr name="TextBox 18" id="18"/>
-          <p:cNvSpPr txBox="true"/>
-          <p:nvPr/>
-        </p:nvSpPr>
-        <p:spPr>
-          <a:xfrm rot="0">
-            <a:off x="7536449" y="2588361"/>
+          <p:cNvPr id="18" name="TextBox 18"/>
+          <p:cNvSpPr txBox="1"/>
+          <p:nvPr/>
+        </p:nvSpPr>
+        <p:spPr>
+          <a:xfrm>
+            <a:off x="9483062" y="2630283"/>
             <a:ext cx="3215103" cy="644423"/>
           </a:xfrm>
           <a:prstGeom prst="rect">
@@ -5150,12 +4993,12 @@
           </a:prstGeom>
         </p:spPr>
         <p:txBody>
-          <a:bodyPr anchor="t" rtlCol="false" tIns="0" lIns="0" bIns="0" rIns="0">
+          <a:bodyPr lIns="0" tIns="0" rIns="0" bIns="0" rtlCol="0" anchor="t">
             <a:spAutoFit/>
           </a:bodyPr>
           <a:lstStyle/>
           <a:p>
-            <a:pPr algn="ctr" marL="0" indent="0" lvl="0">
+            <a:pPr marL="0" lvl="0" indent="0" algn="ctr">
               <a:lnSpc>
                 <a:spcPts val="5210"/>
               </a:lnSpc>
@@ -5180,13 +5023,13 @@
       </p:sp>
       <p:sp>
         <p:nvSpPr>
-          <p:cNvPr name="TextBox 19" id="19"/>
-          <p:cNvSpPr txBox="true"/>
-          <p:nvPr/>
-        </p:nvSpPr>
-        <p:spPr>
-          <a:xfrm rot="0">
-            <a:off x="14280308" y="2588361"/>
+          <p:cNvPr id="21" name="TextBox 21"/>
+          <p:cNvSpPr txBox="1"/>
+          <p:nvPr/>
+        </p:nvSpPr>
+        <p:spPr>
+          <a:xfrm>
+            <a:off x="12854991" y="2630283"/>
             <a:ext cx="3215103" cy="644423"/>
           </a:xfrm>
           <a:prstGeom prst="rect">
@@ -5194,12 +5037,12 @@
           </a:prstGeom>
         </p:spPr>
         <p:txBody>
-          <a:bodyPr anchor="t" rtlCol="false" tIns="0" lIns="0" bIns="0" rIns="0">
+          <a:bodyPr lIns="0" tIns="0" rIns="0" bIns="0" rtlCol="0" anchor="t">
             <a:spAutoFit/>
           </a:bodyPr>
           <a:lstStyle/>
           <a:p>
-            <a:pPr algn="ctr" marL="0" indent="0" lvl="0">
+            <a:pPr marL="0" lvl="0" indent="0" algn="ctr">
               <a:lnSpc>
                 <a:spcPts val="5210"/>
               </a:lnSpc>
@@ -5208,95 +5051,7 @@
               </a:spcBef>
             </a:pPr>
             <a:r>
-              <a:rPr lang="en-US" sz="4008" strike="noStrike" u="none">
-                <a:solidFill>
-                  <a:srgbClr val="000000"/>
-                </a:solidFill>
-                <a:latin typeface="Handy Casual"/>
-                <a:ea typeface="Handy Casual"/>
-                <a:cs typeface="Handy Casual"/>
-                <a:sym typeface="Handy Casual"/>
-              </a:rPr>
-              <a:t>Indexed DB</a:t>
-            </a:r>
-          </a:p>
-        </p:txBody>
-      </p:sp>
-      <p:sp>
-        <p:nvSpPr>
-          <p:cNvPr name="TextBox 20" id="20"/>
-          <p:cNvSpPr txBox="true"/>
-          <p:nvPr/>
-        </p:nvSpPr>
-        <p:spPr>
-          <a:xfrm rot="0">
-            <a:off x="14280308" y="8613895"/>
-            <a:ext cx="3215103" cy="644423"/>
-          </a:xfrm>
-          <a:prstGeom prst="rect">
-            <a:avLst/>
-          </a:prstGeom>
-        </p:spPr>
-        <p:txBody>
-          <a:bodyPr anchor="t" rtlCol="false" tIns="0" lIns="0" bIns="0" rIns="0">
-            <a:spAutoFit/>
-          </a:bodyPr>
-          <a:lstStyle/>
-          <a:p>
-            <a:pPr algn="ctr" marL="0" indent="0" lvl="0">
-              <a:lnSpc>
-                <a:spcPts val="5210"/>
-              </a:lnSpc>
-              <a:spcBef>
-                <a:spcPct val="0"/>
-              </a:spcBef>
-            </a:pPr>
-            <a:r>
-              <a:rPr lang="en-US" sz="4008">
-                <a:solidFill>
-                  <a:srgbClr val="000000"/>
-                </a:solidFill>
-                <a:latin typeface="Handy Casual"/>
-                <a:ea typeface="Handy Casual"/>
-                <a:cs typeface="Handy Casual"/>
-                <a:sym typeface="Handy Casual"/>
-              </a:rPr>
-              <a:t>05</a:t>
-            </a:r>
-          </a:p>
-        </p:txBody>
-      </p:sp>
-      <p:sp>
-        <p:nvSpPr>
-          <p:cNvPr name="TextBox 21" id="21"/>
-          <p:cNvSpPr txBox="true"/>
-          <p:nvPr/>
-        </p:nvSpPr>
-        <p:spPr>
-          <a:xfrm rot="0">
-            <a:off x="10908378" y="2588361"/>
-            <a:ext cx="3215103" cy="644423"/>
-          </a:xfrm>
-          <a:prstGeom prst="rect">
-            <a:avLst/>
-          </a:prstGeom>
-        </p:spPr>
-        <p:txBody>
-          <a:bodyPr anchor="t" rtlCol="false" tIns="0" lIns="0" bIns="0" rIns="0">
-            <a:spAutoFit/>
-          </a:bodyPr>
-          <a:lstStyle/>
-          <a:p>
-            <a:pPr algn="ctr" marL="0" indent="0" lvl="0">
-              <a:lnSpc>
-                <a:spcPts val="5210"/>
-              </a:lnSpc>
-              <a:spcBef>
-                <a:spcPct val="0"/>
-              </a:spcBef>
-            </a:pPr>
-            <a:r>
-              <a:rPr lang="en-US" sz="4008" strike="noStrike" u="none">
+              <a:rPr lang="en-US" sz="4008" u="none" strike="noStrike">
                 <a:solidFill>
                   <a:srgbClr val="000000"/>
                 </a:solidFill>
@@ -5312,26 +5067,26 @@
       </p:sp>
       <p:sp>
         <p:nvSpPr>
-          <p:cNvPr name="TextBox 22" id="22"/>
-          <p:cNvSpPr txBox="true"/>
-          <p:nvPr/>
-        </p:nvSpPr>
-        <p:spPr>
-          <a:xfrm rot="0">
+          <p:cNvPr id="22" name="TextBox 22"/>
+          <p:cNvSpPr txBox="1"/>
+          <p:nvPr/>
+        </p:nvSpPr>
+        <p:spPr>
+          <a:xfrm>
             <a:off x="2702760" y="968538"/>
-            <a:ext cx="13149444" cy="943589"/>
+            <a:ext cx="13149444" cy="897682"/>
           </a:xfrm>
           <a:prstGeom prst="rect">
             <a:avLst/>
           </a:prstGeom>
         </p:spPr>
         <p:txBody>
-          <a:bodyPr anchor="t" rtlCol="false" tIns="0" lIns="0" bIns="0" rIns="0">
+          <a:bodyPr lIns="0" tIns="0" rIns="0" bIns="0" rtlCol="0" anchor="t">
             <a:spAutoFit/>
           </a:bodyPr>
           <a:lstStyle/>
           <a:p>
-            <a:pPr algn="ctr" marL="0" indent="0" lvl="0">
+            <a:pPr marL="0" lvl="0" indent="0" algn="ctr">
               <a:lnSpc>
                 <a:spcPts val="6979"/>
               </a:lnSpc>
@@ -5340,13 +5095,13 @@
               </a:spcBef>
             </a:pPr>
             <a:r>
-              <a:rPr lang="en-US" sz="7194">
+              <a:rPr lang="en-US" sz="7194" dirty="0">
                 <a:solidFill>
                   <a:srgbClr val="000000"/>
                 </a:solidFill>
-                <a:latin typeface="Handy Casual"/>
+                <a:latin typeface="Arial" panose="020B0604020202020204" pitchFamily="34" charset="0"/>
                 <a:ea typeface="Handy Casual"/>
-                <a:cs typeface="Handy Casual"/>
+                <a:cs typeface="Arial" panose="020B0604020202020204" pitchFamily="34" charset="0"/>
                 <a:sym typeface="Handy Casual"/>
               </a:rPr>
               <a:t>DATA ORGANIZATION FLOW</a:t>
@@ -5356,26 +5111,26 @@
       </p:sp>
       <p:sp>
         <p:nvSpPr>
-          <p:cNvPr name="TextBox 23" id="23"/>
-          <p:cNvSpPr txBox="true"/>
-          <p:nvPr/>
-        </p:nvSpPr>
-        <p:spPr>
-          <a:xfrm rot="0">
-            <a:off x="1008852" y="4095203"/>
-            <a:ext cx="2782578" cy="3065098"/>
+          <p:cNvPr id="23" name="TextBox 23"/>
+          <p:cNvSpPr txBox="1"/>
+          <p:nvPr/>
+        </p:nvSpPr>
+        <p:spPr>
+          <a:xfrm>
+            <a:off x="2955465" y="4137125"/>
+            <a:ext cx="2782578" cy="2740494"/>
           </a:xfrm>
           <a:prstGeom prst="rect">
             <a:avLst/>
           </a:prstGeom>
         </p:spPr>
         <p:txBody>
-          <a:bodyPr anchor="t" rtlCol="false" tIns="0" lIns="0" bIns="0" rIns="0">
+          <a:bodyPr lIns="0" tIns="0" rIns="0" bIns="0" rtlCol="0" anchor="t">
             <a:spAutoFit/>
           </a:bodyPr>
           <a:lstStyle/>
           <a:p>
-            <a:pPr algn="l" marL="0" indent="0" lvl="0">
+            <a:pPr marL="0" lvl="0" indent="0" algn="l">
               <a:lnSpc>
                 <a:spcPts val="2738"/>
               </a:lnSpc>
@@ -5384,13 +5139,13 @@
               </a:spcBef>
             </a:pPr>
             <a:r>
-              <a:rPr lang="en-US" sz="1956">
+              <a:rPr lang="en-US" sz="1956" dirty="0">
                 <a:solidFill>
                   <a:srgbClr val="000000"/>
                 </a:solidFill>
-                <a:latin typeface="Gloria Hallelujah"/>
+                <a:latin typeface="Arial" panose="020B0604020202020204" pitchFamily="34" charset="0"/>
                 <a:ea typeface="Gloria Hallelujah"/>
-                <a:cs typeface="Gloria Hallelujah"/>
+                <a:cs typeface="Arial" panose="020B0604020202020204" pitchFamily="34" charset="0"/>
                 <a:sym typeface="Gloria Hallelujah"/>
               </a:rPr>
               <a:t>Unstructured information enters the database system. This includes text, numbers, dates, and other data types collected from various sources before processing.</a:t>
@@ -5400,13 +5155,13 @@
       </p:sp>
       <p:sp>
         <p:nvSpPr>
-          <p:cNvPr name="TextBox 24" id="24"/>
-          <p:cNvSpPr txBox="true"/>
-          <p:nvPr/>
-        </p:nvSpPr>
-        <p:spPr>
-          <a:xfrm rot="0">
-            <a:off x="4380782" y="4095203"/>
+          <p:cNvPr id="24" name="TextBox 24"/>
+          <p:cNvSpPr txBox="1"/>
+          <p:nvPr/>
+        </p:nvSpPr>
+        <p:spPr>
+          <a:xfrm>
+            <a:off x="6327395" y="4137125"/>
             <a:ext cx="2782578" cy="2381390"/>
           </a:xfrm>
           <a:prstGeom prst="rect">
@@ -5414,12 +5169,12 @@
           </a:prstGeom>
         </p:spPr>
         <p:txBody>
-          <a:bodyPr anchor="t" rtlCol="false" tIns="0" lIns="0" bIns="0" rIns="0">
+          <a:bodyPr lIns="0" tIns="0" rIns="0" bIns="0" rtlCol="0" anchor="t">
             <a:spAutoFit/>
           </a:bodyPr>
           <a:lstStyle/>
           <a:p>
-            <a:pPr algn="l" marL="0" indent="0" lvl="0">
+            <a:pPr marL="0" lvl="0" indent="0" algn="l">
               <a:lnSpc>
                 <a:spcPts val="2738"/>
               </a:lnSpc>
@@ -5428,13 +5183,13 @@
               </a:spcBef>
             </a:pPr>
             <a:r>
-              <a:rPr lang="en-US" sz="1956">
+              <a:rPr lang="en-US" sz="1956" dirty="0">
                 <a:solidFill>
                   <a:srgbClr val="000000"/>
                 </a:solidFill>
-                <a:latin typeface="Gloria Hallelujah"/>
+                <a:latin typeface="Arial" panose="020B0604020202020204" pitchFamily="34" charset="0"/>
                 <a:ea typeface="Gloria Hallelujah"/>
-                <a:cs typeface="Gloria Hallelujah"/>
+                <a:cs typeface="Arial" panose="020B0604020202020204" pitchFamily="34" charset="0"/>
                 <a:sym typeface="Gloria Hallelujah"/>
               </a:rPr>
               <a:t>Data is organized into tables - structured grids with rows and columns. Each table represents a specific entity like customers, products, or orders.</a:t>
@@ -5444,26 +5199,26 @@
       </p:sp>
       <p:sp>
         <p:nvSpPr>
-          <p:cNvPr name="TextBox 25" id="25"/>
-          <p:cNvSpPr txBox="true"/>
-          <p:nvPr/>
-        </p:nvSpPr>
-        <p:spPr>
-          <a:xfrm rot="0">
-            <a:off x="7752711" y="4095203"/>
-            <a:ext cx="2782578" cy="2381390"/>
+          <p:cNvPr id="25" name="TextBox 25"/>
+          <p:cNvSpPr txBox="1"/>
+          <p:nvPr/>
+        </p:nvSpPr>
+        <p:spPr>
+          <a:xfrm>
+            <a:off x="9699324" y="4137125"/>
+            <a:ext cx="2782578" cy="2047997"/>
           </a:xfrm>
           <a:prstGeom prst="rect">
             <a:avLst/>
           </a:prstGeom>
         </p:spPr>
         <p:txBody>
-          <a:bodyPr anchor="t" rtlCol="false" tIns="0" lIns="0" bIns="0" rIns="0">
+          <a:bodyPr lIns="0" tIns="0" rIns="0" bIns="0" rtlCol="0" anchor="t">
             <a:spAutoFit/>
           </a:bodyPr>
           <a:lstStyle/>
           <a:p>
-            <a:pPr algn="l" marL="0" indent="0" lvl="0">
+            <a:pPr marL="0" lvl="0" indent="0" algn="l">
               <a:lnSpc>
                 <a:spcPts val="2738"/>
               </a:lnSpc>
@@ -5472,13 +5227,13 @@
               </a:spcBef>
             </a:pPr>
             <a:r>
-              <a:rPr lang="en-US" sz="1956">
+              <a:rPr lang="en-US" sz="1956" dirty="0">
                 <a:solidFill>
                   <a:srgbClr val="000000"/>
                 </a:solidFill>
-                <a:latin typeface="Gloria Hallelujah"/>
+                <a:latin typeface="Arial" panose="020B0604020202020204" pitchFamily="34" charset="0"/>
                 <a:ea typeface="Gloria Hallelujah"/>
-                <a:cs typeface="Gloria Hallelujah"/>
+                <a:cs typeface="Arial" panose="020B0604020202020204" pitchFamily="34" charset="0"/>
                 <a:sym typeface="Gloria Hallelujah"/>
               </a:rPr>
               <a:t>Each row in a table is a record representing one complete entry. A customer record contains all information about a single customer.</a:t>
@@ -5488,26 +5243,26 @@
       </p:sp>
       <p:sp>
         <p:nvSpPr>
-          <p:cNvPr name="TextBox 26" id="26"/>
-          <p:cNvSpPr txBox="true"/>
-          <p:nvPr/>
-        </p:nvSpPr>
-        <p:spPr>
-          <a:xfrm rot="0">
-            <a:off x="11124641" y="4095203"/>
-            <a:ext cx="2782578" cy="2723244"/>
+          <p:cNvPr id="26" name="TextBox 26"/>
+          <p:cNvSpPr txBox="1"/>
+          <p:nvPr/>
+        </p:nvSpPr>
+        <p:spPr>
+          <a:xfrm>
+            <a:off x="13071254" y="4137125"/>
+            <a:ext cx="2782578" cy="2047997"/>
           </a:xfrm>
           <a:prstGeom prst="rect">
             <a:avLst/>
           </a:prstGeom>
         </p:spPr>
         <p:txBody>
-          <a:bodyPr anchor="t" rtlCol="false" tIns="0" lIns="0" bIns="0" rIns="0">
+          <a:bodyPr lIns="0" tIns="0" rIns="0" bIns="0" rtlCol="0" anchor="t">
             <a:spAutoFit/>
           </a:bodyPr>
           <a:lstStyle/>
           <a:p>
-            <a:pPr algn="l" marL="0" indent="0" lvl="0">
+            <a:pPr marL="0" lvl="0" indent="0" algn="l">
               <a:lnSpc>
                 <a:spcPts val="2738"/>
               </a:lnSpc>
@@ -5516,60 +5271,16 @@
               </a:spcBef>
             </a:pPr>
             <a:r>
-              <a:rPr lang="en-US" sz="1956">
+              <a:rPr lang="en-US" sz="1956" dirty="0">
                 <a:solidFill>
                   <a:srgbClr val="000000"/>
                 </a:solidFill>
-                <a:latin typeface="Gloria Hallelujah"/>
+                <a:latin typeface="Arial" panose="020B0604020202020204" pitchFamily="34" charset="0"/>
                 <a:ea typeface="Gloria Hallelujah"/>
-                <a:cs typeface="Gloria Hallelujah"/>
+                <a:cs typeface="Arial" panose="020B0604020202020204" pitchFamily="34" charset="0"/>
                 <a:sym typeface="Gloria Hallelujah"/>
               </a:rPr>
               <a:t>Fields are the columns that define what data each record contains. Examples include name, email, date, and ID fields with specific data types.</a:t>
-            </a:r>
-          </a:p>
-        </p:txBody>
-      </p:sp>
-      <p:sp>
-        <p:nvSpPr>
-          <p:cNvPr name="TextBox 27" id="27"/>
-          <p:cNvSpPr txBox="true"/>
-          <p:nvPr/>
-        </p:nvSpPr>
-        <p:spPr>
-          <a:xfrm rot="0">
-            <a:off x="14496570" y="4095203"/>
-            <a:ext cx="2782578" cy="2723244"/>
-          </a:xfrm>
-          <a:prstGeom prst="rect">
-            <a:avLst/>
-          </a:prstGeom>
-        </p:spPr>
-        <p:txBody>
-          <a:bodyPr anchor="t" rtlCol="false" tIns="0" lIns="0" bIns="0" rIns="0">
-            <a:spAutoFit/>
-          </a:bodyPr>
-          <a:lstStyle/>
-          <a:p>
-            <a:pPr algn="l" marL="0" indent="0" lvl="0">
-              <a:lnSpc>
-                <a:spcPts val="2738"/>
-              </a:lnSpc>
-              <a:spcBef>
-                <a:spcPct val="0"/>
-              </a:spcBef>
-            </a:pPr>
-            <a:r>
-              <a:rPr lang="en-US" sz="1956">
-                <a:solidFill>
-                  <a:srgbClr val="000000"/>
-                </a:solidFill>
-                <a:latin typeface="Gloria Hallelujah"/>
-                <a:ea typeface="Gloria Hallelujah"/>
-                <a:cs typeface="Gloria Hallelujah"/>
-                <a:sym typeface="Gloria Hallelujah"/>
-              </a:rPr>
-              <a:t>Indexes are created on frequently searched fields for faster retrieval. The organized database enables efficient queries and data management.</a:t>
             </a:r>
           </a:p>
         </p:txBody>
@@ -5583,7 +5294,7 @@
 </file>
 
 <file path=ppt/slides/slide3.xml><?xml version="1.0" encoding="utf-8"?>
-<p:sld xmlns:p="http://schemas.openxmlformats.org/presentationml/2006/main" xmlns:a="http://schemas.openxmlformats.org/drawingml/2006/main" xmlns:r="http://schemas.openxmlformats.org/officeDocument/2006/relationships">
+<p:sld xmlns:a="http://schemas.openxmlformats.org/drawingml/2006/main" xmlns:r="http://schemas.openxmlformats.org/officeDocument/2006/relationships" xmlns:p="http://schemas.openxmlformats.org/presentationml/2006/main">
   <p:cSld>
     <p:spTree>
       <p:nvGrpSpPr>
@@ -5601,12 +5312,12 @@
       </p:grpSpPr>
       <p:sp>
         <p:nvSpPr>
-          <p:cNvPr name="Freeform 2" id="2"/>
+          <p:cNvPr id="2" name="Freeform 2"/>
           <p:cNvSpPr/>
           <p:nvPr/>
         </p:nvSpPr>
         <p:spPr>
-          <a:xfrm flipH="false" flipV="false" rot="0">
+          <a:xfrm>
             <a:off x="344288" y="270483"/>
             <a:ext cx="7339348" cy="3202447"/>
           </a:xfrm>
@@ -5615,9 +5326,9 @@
             <a:gdLst/>
             <a:ahLst/>
             <a:cxnLst/>
-            <a:rect r="r" b="b" t="t" l="l"/>
+            <a:rect l="l" t="t" r="r" b="b"/>
             <a:pathLst>
-              <a:path h="3202447" w="7339348">
+              <a:path w="7339348" h="3202447">
                 <a:moveTo>
                   <a:pt x="0" y="0"/>
                 </a:moveTo>
@@ -5640,19 +5351,19 @@
           <a:blipFill>
             <a:blip r:embed="rId2"/>
             <a:stretch>
-              <a:fillRect l="0" t="-705" r="0" b="-705"/>
+              <a:fillRect t="-705" b="-705"/>
             </a:stretch>
           </a:blipFill>
         </p:spPr>
       </p:sp>
       <p:sp>
         <p:nvSpPr>
-          <p:cNvPr name="Freeform 3" id="3"/>
+          <p:cNvPr id="3" name="Freeform 3"/>
           <p:cNvSpPr/>
           <p:nvPr/>
         </p:nvSpPr>
         <p:spPr>
-          <a:xfrm flipH="false" flipV="false" rot="0">
+          <a:xfrm>
             <a:off x="3493371" y="6946502"/>
             <a:ext cx="11301259" cy="2980707"/>
           </a:xfrm>
@@ -5661,9 +5372,9 @@
             <a:gdLst/>
             <a:ahLst/>
             <a:cxnLst/>
-            <a:rect r="r" b="b" t="t" l="l"/>
+            <a:rect l="l" t="t" r="r" b="b"/>
             <a:pathLst>
-              <a:path h="2980707" w="11301259">
+              <a:path w="11301259" h="2980707">
                 <a:moveTo>
                   <a:pt x="0" y="0"/>
                 </a:moveTo>
@@ -5686,19 +5397,19 @@
           <a:blipFill>
             <a:blip r:embed="rId3"/>
             <a:stretch>
-              <a:fillRect l="0" t="0" r="0" b="0"/>
+              <a:fillRect/>
             </a:stretch>
           </a:blipFill>
         </p:spPr>
       </p:sp>
       <p:sp>
         <p:nvSpPr>
-          <p:cNvPr name="Freeform 4" id="4"/>
+          <p:cNvPr id="4" name="Freeform 4"/>
           <p:cNvSpPr/>
           <p:nvPr/>
         </p:nvSpPr>
         <p:spPr>
-          <a:xfrm flipH="false" flipV="false" rot="0">
+          <a:xfrm>
             <a:off x="8177194" y="1596123"/>
             <a:ext cx="9278771" cy="4061733"/>
           </a:xfrm>
@@ -5707,9 +5418,9 @@
             <a:gdLst/>
             <a:ahLst/>
             <a:cxnLst/>
-            <a:rect r="r" b="b" t="t" l="l"/>
+            <a:rect l="l" t="t" r="r" b="b"/>
             <a:pathLst>
-              <a:path h="4061733" w="9278771">
+              <a:path w="9278771" h="4061733">
                 <a:moveTo>
                   <a:pt x="0" y="0"/>
                 </a:moveTo>
@@ -5732,19 +5443,19 @@
           <a:blipFill>
             <a:blip r:embed="rId4"/>
             <a:stretch>
-              <a:fillRect l="0" t="-828" r="0" b="-828"/>
+              <a:fillRect t="-828" b="-828"/>
             </a:stretch>
           </a:blipFill>
         </p:spPr>
       </p:sp>
       <p:sp>
         <p:nvSpPr>
-          <p:cNvPr name="Freeform 5" id="5"/>
+          <p:cNvPr id="5" name="Freeform 5"/>
           <p:cNvSpPr/>
           <p:nvPr/>
         </p:nvSpPr>
         <p:spPr>
-          <a:xfrm flipH="false" flipV="false" rot="0">
+          <a:xfrm>
             <a:off x="661978" y="3158961"/>
             <a:ext cx="7021657" cy="3333698"/>
           </a:xfrm>
@@ -5753,9 +5464,9 @@
             <a:gdLst/>
             <a:ahLst/>
             <a:cxnLst/>
-            <a:rect r="r" b="b" t="t" l="l"/>
+            <a:rect l="l" t="t" r="r" b="b"/>
             <a:pathLst>
-              <a:path h="3333698" w="7021657">
+              <a:path w="7021657" h="3333698">
                 <a:moveTo>
                   <a:pt x="0" y="0"/>
                 </a:moveTo>
@@ -5778,7 +5489,7 @@
           <a:blipFill>
             <a:blip r:embed="rId5"/>
             <a:stretch>
-              <a:fillRect l="0" t="0" r="0" b="0"/>
+              <a:fillRect/>
             </a:stretch>
           </a:blipFill>
         </p:spPr>
@@ -5792,7 +5503,7 @@
 </file>
 
 <file path=ppt/slides/slide4.xml><?xml version="1.0" encoding="utf-8"?>
-<p:sld xmlns:p="http://schemas.openxmlformats.org/presentationml/2006/main" xmlns:a="http://schemas.openxmlformats.org/drawingml/2006/main" xmlns:r="http://schemas.openxmlformats.org/officeDocument/2006/relationships">
+<p:sld xmlns:a="http://schemas.openxmlformats.org/drawingml/2006/main" xmlns:r="http://schemas.openxmlformats.org/officeDocument/2006/relationships" xmlns:p="http://schemas.openxmlformats.org/presentationml/2006/main">
   <p:cSld>
     <p:spTree>
       <p:nvGrpSpPr>
@@ -5810,12 +5521,12 @@
       </p:grpSpPr>
       <p:sp>
         <p:nvSpPr>
-          <p:cNvPr name="Freeform 2" id="2"/>
+          <p:cNvPr id="2" name="Freeform 2"/>
           <p:cNvSpPr/>
           <p:nvPr/>
         </p:nvSpPr>
         <p:spPr>
-          <a:xfrm flipH="false" flipV="false" rot="0">
+          <a:xfrm>
             <a:off x="0" y="0"/>
             <a:ext cx="18288000" cy="10287000"/>
           </a:xfrm>
@@ -5824,9 +5535,9 @@
             <a:gdLst/>
             <a:ahLst/>
             <a:cxnLst/>
-            <a:rect r="r" b="b" t="t" l="l"/>
+            <a:rect l="l" t="t" r="r" b="b"/>
             <a:pathLst>
-              <a:path h="10287000" w="18288000">
+              <a:path w="18288000" h="10287000">
                 <a:moveTo>
                   <a:pt x="0" y="0"/>
                 </a:moveTo>
@@ -5849,19 +5560,19 @@
           <a:blipFill>
             <a:blip r:embed="rId2"/>
             <a:stretch>
-              <a:fillRect l="0" t="0" r="0" b="0"/>
+              <a:fillRect/>
             </a:stretch>
           </a:blipFill>
         </p:spPr>
       </p:sp>
       <p:sp>
         <p:nvSpPr>
-          <p:cNvPr name="Freeform 3" id="3"/>
+          <p:cNvPr id="3" name="Freeform 3"/>
           <p:cNvSpPr/>
           <p:nvPr/>
         </p:nvSpPr>
         <p:spPr>
-          <a:xfrm flipH="false" flipV="false" rot="0">
+          <a:xfrm>
             <a:off x="898004" y="4554205"/>
             <a:ext cx="3224443" cy="4704095"/>
           </a:xfrm>
@@ -5870,9 +5581,9 @@
             <a:gdLst/>
             <a:ahLst/>
             <a:cxnLst/>
-            <a:rect r="r" b="b" t="t" l="l"/>
+            <a:rect l="l" t="t" r="r" b="b"/>
             <a:pathLst>
-              <a:path h="4704095" w="3224443">
+              <a:path w="3224443" h="4704095">
                 <a:moveTo>
                   <a:pt x="0" y="0"/>
                 </a:moveTo>
@@ -5901,33 +5612,33 @@
               </a:extLst>
             </a:blip>
             <a:stretch>
-              <a:fillRect l="0" t="0" r="0" b="0"/>
+              <a:fillRect/>
             </a:stretch>
           </a:blipFill>
         </p:spPr>
       </p:sp>
       <p:sp>
         <p:nvSpPr>
-          <p:cNvPr name="TextBox 4" id="4"/>
-          <p:cNvSpPr txBox="true"/>
-          <p:nvPr/>
-        </p:nvSpPr>
-        <p:spPr>
-          <a:xfrm rot="0">
-            <a:off x="2702760" y="968538"/>
-            <a:ext cx="13149444" cy="943589"/>
+          <p:cNvPr id="4" name="TextBox 4"/>
+          <p:cNvSpPr txBox="1"/>
+          <p:nvPr/>
+        </p:nvSpPr>
+        <p:spPr>
+          <a:xfrm>
+            <a:off x="2467909" y="404659"/>
+            <a:ext cx="13149444" cy="1795363"/>
           </a:xfrm>
           <a:prstGeom prst="rect">
             <a:avLst/>
           </a:prstGeom>
         </p:spPr>
         <p:txBody>
-          <a:bodyPr anchor="t" rtlCol="false" tIns="0" lIns="0" bIns="0" rIns="0">
+          <a:bodyPr lIns="0" tIns="0" rIns="0" bIns="0" rtlCol="0" anchor="t">
             <a:spAutoFit/>
           </a:bodyPr>
           <a:lstStyle/>
           <a:p>
-            <a:pPr algn="ctr" marL="0" indent="0" lvl="0">
+            <a:pPr marL="0" lvl="0" indent="0" algn="ctr">
               <a:lnSpc>
                 <a:spcPts val="6979"/>
               </a:lnSpc>
@@ -5936,13 +5647,13 @@
               </a:spcBef>
             </a:pPr>
             <a:r>
-              <a:rPr lang="en-US" sz="7194">
+              <a:rPr lang="en-US" sz="7194" dirty="0">
                 <a:solidFill>
                   <a:srgbClr val="000000"/>
                 </a:solidFill>
-                <a:latin typeface="Handy Casual"/>
+                <a:latin typeface="Arial" panose="020B0604020202020204" pitchFamily="34" charset="0"/>
                 <a:ea typeface="Handy Casual"/>
-                <a:cs typeface="Handy Casual"/>
+                <a:cs typeface="Arial" panose="020B0604020202020204" pitchFamily="34" charset="0"/>
                 <a:sym typeface="Handy Casual"/>
               </a:rPr>
               <a:t>BENEFITS OF DATABASE ORGANIZATION</a:t>
@@ -5952,12 +5663,12 @@
       </p:sp>
       <p:sp>
         <p:nvSpPr>
-          <p:cNvPr name="Freeform 5" id="5"/>
+          <p:cNvPr id="5" name="Freeform 5"/>
           <p:cNvSpPr/>
           <p:nvPr/>
         </p:nvSpPr>
         <p:spPr>
-          <a:xfrm flipH="false" flipV="false" rot="0">
+          <a:xfrm>
             <a:off x="1310842" y="2588585"/>
             <a:ext cx="2691697" cy="2006732"/>
           </a:xfrm>
@@ -5966,9 +5677,9 @@
             <a:gdLst/>
             <a:ahLst/>
             <a:cxnLst/>
-            <a:rect r="r" b="b" t="t" l="l"/>
+            <a:rect l="l" t="t" r="r" b="b"/>
             <a:pathLst>
-              <a:path h="2006732" w="2691697">
+              <a:path w="2691697" h="2006732">
                 <a:moveTo>
                   <a:pt x="0" y="0"/>
                 </a:moveTo>
@@ -5991,19 +5702,19 @@
           <a:blipFill>
             <a:blip r:embed="rId5"/>
             <a:stretch>
-              <a:fillRect l="0" t="0" r="0" b="0"/>
+              <a:fillRect/>
             </a:stretch>
           </a:blipFill>
         </p:spPr>
       </p:sp>
       <p:sp>
         <p:nvSpPr>
-          <p:cNvPr name="Freeform 6" id="6"/>
+          <p:cNvPr id="6" name="Freeform 6"/>
           <p:cNvSpPr/>
           <p:nvPr/>
         </p:nvSpPr>
         <p:spPr>
-          <a:xfrm flipH="false" flipV="false" rot="0">
+          <a:xfrm>
             <a:off x="5298187" y="2522650"/>
             <a:ext cx="1483245" cy="1885582"/>
           </a:xfrm>
@@ -6012,9 +5723,9 @@
             <a:gdLst/>
             <a:ahLst/>
             <a:cxnLst/>
-            <a:rect r="r" b="b" t="t" l="l"/>
+            <a:rect l="l" t="t" r="r" b="b"/>
             <a:pathLst>
-              <a:path h="1885582" w="1483245">
+              <a:path w="1483245" h="1885582">
                 <a:moveTo>
                   <a:pt x="0" y="0"/>
                 </a:moveTo>
@@ -6037,30 +5748,30 @@
           <a:blipFill>
             <a:blip r:embed="rId6"/>
             <a:stretch>
-              <a:fillRect l="0" t="0" r="0" b="0"/>
+              <a:fillRect/>
             </a:stretch>
           </a:blipFill>
         </p:spPr>
       </p:sp>
       <p:sp>
         <p:nvSpPr>
-          <p:cNvPr name="Freeform 7" id="7"/>
+          <p:cNvPr id="7" name="Freeform 7"/>
           <p:cNvSpPr/>
           <p:nvPr/>
         </p:nvSpPr>
         <p:spPr>
-          <a:xfrm flipH="false" flipV="false" rot="0">
-            <a:off x="11231202" y="-135303"/>
-            <a:ext cx="2275078" cy="8069613"/>
+          <a:xfrm>
+            <a:off x="11334194" y="2032905"/>
+            <a:ext cx="2185866" cy="5671183"/>
           </a:xfrm>
           <a:custGeom>
             <a:avLst/>
             <a:gdLst/>
             <a:ahLst/>
             <a:cxnLst/>
-            <a:rect r="r" b="b" t="t" l="l"/>
+            <a:rect l="l" t="t" r="r" b="b"/>
             <a:pathLst>
-              <a:path h="8069613" w="2275078">
+              <a:path w="2275078" h="8069613">
                 <a:moveTo>
                   <a:pt x="0" y="0"/>
                 </a:moveTo>
@@ -6083,19 +5794,19 @@
           <a:blipFill>
             <a:blip r:embed="rId7"/>
             <a:stretch>
-              <a:fillRect l="0" t="0" r="0" b="0"/>
+              <a:fillRect/>
             </a:stretch>
           </a:blipFill>
         </p:spPr>
       </p:sp>
       <p:sp>
         <p:nvSpPr>
-          <p:cNvPr name="Freeform 8" id="8"/>
+          <p:cNvPr id="8" name="Freeform 8"/>
           <p:cNvSpPr/>
           <p:nvPr/>
         </p:nvSpPr>
         <p:spPr>
-          <a:xfrm flipH="false" flipV="false" rot="0">
+          <a:xfrm>
             <a:off x="7887677" y="2263127"/>
             <a:ext cx="2185866" cy="1808804"/>
           </a:xfrm>
@@ -6104,9 +5815,9 @@
             <a:gdLst/>
             <a:ahLst/>
             <a:cxnLst/>
-            <a:rect r="r" b="b" t="t" l="l"/>
+            <a:rect l="l" t="t" r="r" b="b"/>
             <a:pathLst>
-              <a:path h="1808804" w="2185866">
+              <a:path w="2185866" h="1808804">
                 <a:moveTo>
                   <a:pt x="0" y="0"/>
                 </a:moveTo>
@@ -6129,19 +5840,19 @@
           <a:blipFill>
             <a:blip r:embed="rId8"/>
             <a:stretch>
-              <a:fillRect l="0" t="0" r="0" b="0"/>
+              <a:fillRect/>
             </a:stretch>
           </a:blipFill>
         </p:spPr>
       </p:sp>
       <p:sp>
         <p:nvSpPr>
-          <p:cNvPr name="Freeform 9" id="9"/>
+          <p:cNvPr id="9" name="Freeform 9"/>
           <p:cNvSpPr/>
           <p:nvPr/>
         </p:nvSpPr>
         <p:spPr>
-          <a:xfrm flipH="false" flipV="false" rot="0">
+          <a:xfrm>
             <a:off x="14725671" y="2488103"/>
             <a:ext cx="1829746" cy="1712366"/>
           </a:xfrm>
@@ -6150,9 +5861,9 @@
             <a:gdLst/>
             <a:ahLst/>
             <a:cxnLst/>
-            <a:rect r="r" b="b" t="t" l="l"/>
+            <a:rect l="l" t="t" r="r" b="b"/>
             <a:pathLst>
-              <a:path h="1712366" w="1829746">
+              <a:path w="1829746" h="1712366">
                 <a:moveTo>
                   <a:pt x="0" y="0"/>
                 </a:moveTo>
@@ -6175,33 +5886,33 @@
           <a:blipFill>
             <a:blip r:embed="rId9"/>
             <a:stretch>
-              <a:fillRect l="0" t="0" r="0" b="0"/>
+              <a:fillRect/>
             </a:stretch>
           </a:blipFill>
         </p:spPr>
       </p:sp>
       <p:sp>
         <p:nvSpPr>
-          <p:cNvPr name="TextBox 10" id="10"/>
-          <p:cNvSpPr txBox="true"/>
-          <p:nvPr/>
-        </p:nvSpPr>
-        <p:spPr>
-          <a:xfrm rot="0">
+          <p:cNvPr id="10" name="TextBox 10"/>
+          <p:cNvSpPr txBox="1"/>
+          <p:nvPr/>
+        </p:nvSpPr>
+        <p:spPr>
+          <a:xfrm>
             <a:off x="1230976" y="4621623"/>
-            <a:ext cx="2558500" cy="514013"/>
+            <a:ext cx="2558500" cy="491930"/>
           </a:xfrm>
           <a:prstGeom prst="rect">
             <a:avLst/>
           </a:prstGeom>
         </p:spPr>
         <p:txBody>
-          <a:bodyPr anchor="t" rtlCol="false" tIns="0" lIns="0" bIns="0" rIns="0">
+          <a:bodyPr lIns="0" tIns="0" rIns="0" bIns="0" rtlCol="0" anchor="t">
             <a:spAutoFit/>
           </a:bodyPr>
           <a:lstStyle/>
           <a:p>
-            <a:pPr algn="ctr" marL="0" indent="0" lvl="0">
+            <a:pPr marL="0" lvl="0" indent="0" algn="ctr">
               <a:lnSpc>
                 <a:spcPts val="4218"/>
               </a:lnSpc>
@@ -6210,13 +5921,13 @@
               </a:spcBef>
             </a:pPr>
             <a:r>
-              <a:rPr lang="en-US" sz="3013">
+              <a:rPr lang="en-US" sz="3013" dirty="0">
                 <a:solidFill>
                   <a:srgbClr val="000000"/>
                 </a:solidFill>
-                <a:latin typeface="Handy Casual"/>
+                <a:latin typeface="Arial" panose="020B0604020202020204" pitchFamily="34" charset="0"/>
                 <a:ea typeface="Handy Casual"/>
-                <a:cs typeface="Handy Casual"/>
+                <a:cs typeface="Arial" panose="020B0604020202020204" pitchFamily="34" charset="0"/>
                 <a:sym typeface="Handy Casual"/>
               </a:rPr>
               <a:t>Fast Queries</a:t>
@@ -6226,26 +5937,26 @@
       </p:sp>
       <p:sp>
         <p:nvSpPr>
-          <p:cNvPr name="TextBox 11" id="11"/>
-          <p:cNvSpPr txBox="true"/>
-          <p:nvPr/>
-        </p:nvSpPr>
-        <p:spPr>
-          <a:xfrm rot="0">
+          <p:cNvPr id="11" name="TextBox 11"/>
+          <p:cNvSpPr txBox="1"/>
+          <p:nvPr/>
+        </p:nvSpPr>
+        <p:spPr>
+          <a:xfrm>
             <a:off x="1312124" y="5527040"/>
-            <a:ext cx="2558500" cy="2937899"/>
+            <a:ext cx="2558500" cy="2435154"/>
           </a:xfrm>
           <a:prstGeom prst="rect">
             <a:avLst/>
           </a:prstGeom>
         </p:spPr>
         <p:txBody>
-          <a:bodyPr anchor="t" rtlCol="false" tIns="0" lIns="0" bIns="0" rIns="0">
+          <a:bodyPr lIns="0" tIns="0" rIns="0" bIns="0" rtlCol="0" anchor="t">
             <a:spAutoFit/>
           </a:bodyPr>
           <a:lstStyle/>
           <a:p>
-            <a:pPr algn="l" marL="0" indent="0" lvl="0">
+            <a:pPr marL="0" lvl="0" indent="0" algn="l">
               <a:lnSpc>
                 <a:spcPts val="2393"/>
               </a:lnSpc>
@@ -6254,13 +5965,13 @@
               </a:spcBef>
             </a:pPr>
             <a:r>
-              <a:rPr lang="en-US" sz="1709">
+              <a:rPr lang="en-US" sz="1709" dirty="0">
                 <a:solidFill>
                   <a:srgbClr val="000000"/>
                 </a:solidFill>
-                <a:latin typeface="Gloria Hallelujah"/>
+                <a:latin typeface="Arial" panose="020B0604020202020204" pitchFamily="34" charset="0"/>
                 <a:ea typeface="Gloria Hallelujah"/>
-                <a:cs typeface="Gloria Hallelujah"/>
+                <a:cs typeface="Arial" panose="020B0604020202020204" pitchFamily="34" charset="0"/>
                 <a:sym typeface="Gloria Hallelujah"/>
               </a:rPr>
               <a:t>Well-organized databases with proper indexing enable lightning-fast data retrieval. Queries execute efficiently, reducing wait times and improving application performance significantly.</a:t>
@@ -6270,12 +5981,12 @@
       </p:sp>
       <p:sp>
         <p:nvSpPr>
-          <p:cNvPr name="Freeform 12" id="12"/>
+          <p:cNvPr id="12" name="Freeform 12"/>
           <p:cNvSpPr/>
           <p:nvPr/>
         </p:nvSpPr>
         <p:spPr>
-          <a:xfrm flipH="false" flipV="false" rot="0">
+          <a:xfrm>
             <a:off x="4214891" y="4554205"/>
             <a:ext cx="3224443" cy="4704095"/>
           </a:xfrm>
@@ -6284,9 +5995,9 @@
             <a:gdLst/>
             <a:ahLst/>
             <a:cxnLst/>
-            <a:rect r="r" b="b" t="t" l="l"/>
+            <a:rect l="l" t="t" r="r" b="b"/>
             <a:pathLst>
-              <a:path h="4704095" w="3224443">
+              <a:path w="3224443" h="4704095">
                 <a:moveTo>
                   <a:pt x="0" y="0"/>
                 </a:moveTo>
@@ -6315,33 +6026,33 @@
               </a:extLst>
             </a:blip>
             <a:stretch>
-              <a:fillRect l="0" t="0" r="0" b="0"/>
+              <a:fillRect/>
             </a:stretch>
           </a:blipFill>
         </p:spPr>
       </p:sp>
       <p:sp>
         <p:nvSpPr>
-          <p:cNvPr name="TextBox 13" id="13"/>
-          <p:cNvSpPr txBox="true"/>
-          <p:nvPr/>
-        </p:nvSpPr>
-        <p:spPr>
-          <a:xfrm rot="0">
+          <p:cNvPr id="13" name="TextBox 13"/>
+          <p:cNvSpPr txBox="1"/>
+          <p:nvPr/>
+        </p:nvSpPr>
+        <p:spPr>
+          <a:xfrm>
             <a:off x="4547863" y="5527040"/>
-            <a:ext cx="2558500" cy="2937899"/>
+            <a:ext cx="2558500" cy="2435154"/>
           </a:xfrm>
           <a:prstGeom prst="rect">
             <a:avLst/>
           </a:prstGeom>
         </p:spPr>
         <p:txBody>
-          <a:bodyPr anchor="t" rtlCol="false" tIns="0" lIns="0" bIns="0" rIns="0">
+          <a:bodyPr lIns="0" tIns="0" rIns="0" bIns="0" rtlCol="0" anchor="t">
             <a:spAutoFit/>
           </a:bodyPr>
           <a:lstStyle/>
           <a:p>
-            <a:pPr algn="l" marL="0" indent="0" lvl="0">
+            <a:pPr marL="0" lvl="0" indent="0" algn="l">
               <a:lnSpc>
                 <a:spcPts val="2393"/>
               </a:lnSpc>
@@ -6350,13 +6061,13 @@
               </a:spcBef>
             </a:pPr>
             <a:r>
-              <a:rPr lang="en-US" sz="1709">
+              <a:rPr lang="en-US" sz="1709" dirty="0">
                 <a:solidFill>
                   <a:srgbClr val="000000"/>
                 </a:solidFill>
-                <a:latin typeface="Gloria Hallelujah"/>
+                <a:latin typeface="Arial" panose="020B0604020202020204" pitchFamily="34" charset="0"/>
                 <a:ea typeface="Gloria Hallelujah"/>
-                <a:cs typeface="Gloria Hallelujah"/>
+                <a:cs typeface="Arial" panose="020B0604020202020204" pitchFamily="34" charset="0"/>
                 <a:sym typeface="Gloria Hallelujah"/>
               </a:rPr>
               <a:t>Structured organization ensures data accuracy and consistency. Constraints, relationships, and validation rules maintain reliable information across all database operations.</a:t>
@@ -6366,12 +6077,12 @@
       </p:sp>
       <p:sp>
         <p:nvSpPr>
-          <p:cNvPr name="Freeform 14" id="14"/>
+          <p:cNvPr id="14" name="Freeform 14"/>
           <p:cNvSpPr/>
           <p:nvPr/>
         </p:nvSpPr>
         <p:spPr>
-          <a:xfrm flipH="false" flipV="false" rot="0">
+          <a:xfrm>
             <a:off x="7531778" y="4554205"/>
             <a:ext cx="3224443" cy="4704095"/>
           </a:xfrm>
@@ -6380,9 +6091,9 @@
             <a:gdLst/>
             <a:ahLst/>
             <a:cxnLst/>
-            <a:rect r="r" b="b" t="t" l="l"/>
+            <a:rect l="l" t="t" r="r" b="b"/>
             <a:pathLst>
-              <a:path h="4704095" w="3224443">
+              <a:path w="3224443" h="4704095">
                 <a:moveTo>
                   <a:pt x="0" y="0"/>
                 </a:moveTo>
@@ -6411,33 +6122,33 @@
               </a:extLst>
             </a:blip>
             <a:stretch>
-              <a:fillRect l="0" t="0" r="0" b="0"/>
+              <a:fillRect/>
             </a:stretch>
           </a:blipFill>
         </p:spPr>
       </p:sp>
       <p:sp>
         <p:nvSpPr>
-          <p:cNvPr name="TextBox 15" id="15"/>
-          <p:cNvSpPr txBox="true"/>
-          <p:nvPr/>
-        </p:nvSpPr>
-        <p:spPr>
-          <a:xfrm rot="0">
+          <p:cNvPr id="15" name="TextBox 15"/>
+          <p:cNvSpPr txBox="1"/>
+          <p:nvPr/>
+        </p:nvSpPr>
+        <p:spPr>
+          <a:xfrm>
             <a:off x="7867959" y="5527040"/>
-            <a:ext cx="2558500" cy="2642624"/>
+            <a:ext cx="2558500" cy="2435154"/>
           </a:xfrm>
           <a:prstGeom prst="rect">
             <a:avLst/>
           </a:prstGeom>
         </p:spPr>
         <p:txBody>
-          <a:bodyPr anchor="t" rtlCol="false" tIns="0" lIns="0" bIns="0" rIns="0">
+          <a:bodyPr lIns="0" tIns="0" rIns="0" bIns="0" rtlCol="0" anchor="t">
             <a:spAutoFit/>
           </a:bodyPr>
           <a:lstStyle/>
           <a:p>
-            <a:pPr algn="l" marL="0" indent="0" lvl="0">
+            <a:pPr marL="0" lvl="0" indent="0" algn="l">
               <a:lnSpc>
                 <a:spcPts val="2393"/>
               </a:lnSpc>
@@ -6446,13 +6157,13 @@
               </a:spcBef>
             </a:pPr>
             <a:r>
-              <a:rPr lang="en-US" sz="1709">
+              <a:rPr lang="en-US" sz="1709" dirty="0">
                 <a:solidFill>
                   <a:srgbClr val="000000"/>
                 </a:solidFill>
-                <a:latin typeface="Gloria Hallelujah"/>
+                <a:latin typeface="Arial" panose="020B0604020202020204" pitchFamily="34" charset="0"/>
                 <a:ea typeface="Gloria Hallelujah"/>
-                <a:cs typeface="Gloria Hallelujah"/>
+                <a:cs typeface="Arial" panose="020B0604020202020204" pitchFamily="34" charset="0"/>
                 <a:sym typeface="Gloria Hallelujah"/>
               </a:rPr>
               <a:t>Properly organized databases grow seamlessly with your needs. Good structure allows for easy expansion, handling increased data volumes without performance degradation.</a:t>
@@ -6462,12 +6173,12 @@
       </p:sp>
       <p:sp>
         <p:nvSpPr>
-          <p:cNvPr name="Freeform 16" id="16"/>
+          <p:cNvPr id="16" name="Freeform 16"/>
           <p:cNvSpPr/>
           <p:nvPr/>
         </p:nvSpPr>
         <p:spPr>
-          <a:xfrm flipH="false" flipV="false" rot="0">
+          <a:xfrm>
             <a:off x="10848666" y="4554205"/>
             <a:ext cx="3224443" cy="4704095"/>
           </a:xfrm>
@@ -6476,9 +6187,9 @@
             <a:gdLst/>
             <a:ahLst/>
             <a:cxnLst/>
-            <a:rect r="r" b="b" t="t" l="l"/>
+            <a:rect l="l" t="t" r="r" b="b"/>
             <a:pathLst>
-              <a:path h="4704095" w="3224443">
+              <a:path w="3224443" h="4704095">
                 <a:moveTo>
                   <a:pt x="0" y="0"/>
                 </a:moveTo>
@@ -6507,33 +6218,33 @@
               </a:extLst>
             </a:blip>
             <a:stretch>
-              <a:fillRect l="0" t="0" r="0" b="0"/>
+              <a:fillRect/>
             </a:stretch>
           </a:blipFill>
         </p:spPr>
       </p:sp>
       <p:sp>
         <p:nvSpPr>
-          <p:cNvPr name="TextBox 17" id="17"/>
-          <p:cNvSpPr txBox="true"/>
-          <p:nvPr/>
-        </p:nvSpPr>
-        <p:spPr>
-          <a:xfrm rot="0">
+          <p:cNvPr id="17" name="TextBox 17"/>
+          <p:cNvSpPr txBox="1"/>
+          <p:nvPr/>
+        </p:nvSpPr>
+        <p:spPr>
+          <a:xfrm>
             <a:off x="11261047" y="5527040"/>
-            <a:ext cx="2558500" cy="2642624"/>
+            <a:ext cx="2558500" cy="2435154"/>
           </a:xfrm>
           <a:prstGeom prst="rect">
             <a:avLst/>
           </a:prstGeom>
         </p:spPr>
         <p:txBody>
-          <a:bodyPr anchor="t" rtlCol="false" tIns="0" lIns="0" bIns="0" rIns="0">
+          <a:bodyPr lIns="0" tIns="0" rIns="0" bIns="0" rtlCol="0" anchor="t">
             <a:spAutoFit/>
           </a:bodyPr>
           <a:lstStyle/>
           <a:p>
-            <a:pPr algn="l" marL="0" indent="0" lvl="0">
+            <a:pPr marL="0" lvl="0" indent="0" algn="l">
               <a:lnSpc>
                 <a:spcPts val="2393"/>
               </a:lnSpc>
@@ -6542,13 +6253,13 @@
               </a:spcBef>
             </a:pPr>
             <a:r>
-              <a:rPr lang="en-US" sz="1709">
+              <a:rPr lang="en-US" sz="1709" dirty="0">
                 <a:solidFill>
                   <a:srgbClr val="000000"/>
                 </a:solidFill>
-                <a:latin typeface="Gloria Hallelujah"/>
+                <a:latin typeface="Arial" panose="020B0604020202020204" pitchFamily="34" charset="0"/>
                 <a:ea typeface="Gloria Hallelujah"/>
-                <a:cs typeface="Gloria Hallelujah"/>
+                <a:cs typeface="Arial" panose="020B0604020202020204" pitchFamily="34" charset="0"/>
                 <a:sym typeface="Gloria Hallelujah"/>
               </a:rPr>
               <a:t>Clear organization simplifies updates, backups, and troubleshooting. Database administrators can quickly locate issues and implement changes with minimal disruption.</a:t>
@@ -6558,12 +6269,12 @@
       </p:sp>
       <p:sp>
         <p:nvSpPr>
-          <p:cNvPr name="Freeform 18" id="18"/>
+          <p:cNvPr id="18" name="Freeform 18"/>
           <p:cNvSpPr/>
           <p:nvPr/>
         </p:nvSpPr>
         <p:spPr>
-          <a:xfrm flipH="false" flipV="false" rot="0">
+          <a:xfrm>
             <a:off x="14165553" y="4554205"/>
             <a:ext cx="3224443" cy="4704095"/>
           </a:xfrm>
@@ -6572,9 +6283,9 @@
             <a:gdLst/>
             <a:ahLst/>
             <a:cxnLst/>
-            <a:rect r="r" b="b" t="t" l="l"/>
+            <a:rect l="l" t="t" r="r" b="b"/>
             <a:pathLst>
-              <a:path h="4704095" w="3224443">
+              <a:path w="3224443" h="4704095">
                 <a:moveTo>
                   <a:pt x="0" y="0"/>
                 </a:moveTo>
@@ -6603,33 +6314,33 @@
               </a:extLst>
             </a:blip>
             <a:stretch>
-              <a:fillRect l="0" t="0" r="0" b="0"/>
+              <a:fillRect/>
             </a:stretch>
           </a:blipFill>
         </p:spPr>
       </p:sp>
       <p:sp>
         <p:nvSpPr>
-          <p:cNvPr name="TextBox 19" id="19"/>
-          <p:cNvSpPr txBox="true"/>
-          <p:nvPr/>
-        </p:nvSpPr>
-        <p:spPr>
-          <a:xfrm rot="0">
+          <p:cNvPr id="19" name="TextBox 19"/>
+          <p:cNvSpPr txBox="1"/>
+          <p:nvPr/>
+        </p:nvSpPr>
+        <p:spPr>
+          <a:xfrm>
             <a:off x="4338313" y="4621623"/>
-            <a:ext cx="2977600" cy="514013"/>
+            <a:ext cx="2977600" cy="491930"/>
           </a:xfrm>
           <a:prstGeom prst="rect">
             <a:avLst/>
           </a:prstGeom>
         </p:spPr>
         <p:txBody>
-          <a:bodyPr anchor="t" rtlCol="false" tIns="0" lIns="0" bIns="0" rIns="0">
+          <a:bodyPr lIns="0" tIns="0" rIns="0" bIns="0" rtlCol="0" anchor="t">
             <a:spAutoFit/>
           </a:bodyPr>
           <a:lstStyle/>
           <a:p>
-            <a:pPr algn="ctr" marL="0" indent="0" lvl="0">
+            <a:pPr marL="0" lvl="0" indent="0" algn="ctr">
               <a:lnSpc>
                 <a:spcPts val="4218"/>
               </a:lnSpc>
@@ -6638,13 +6349,13 @@
               </a:spcBef>
             </a:pPr>
             <a:r>
-              <a:rPr lang="en-US" sz="3013">
+              <a:rPr lang="en-US" sz="3013" dirty="0">
                 <a:solidFill>
                   <a:srgbClr val="000000"/>
                 </a:solidFill>
-                <a:latin typeface="Handy Casual"/>
+                <a:latin typeface="Arial" panose="020B0604020202020204" pitchFamily="34" charset="0"/>
                 <a:ea typeface="Handy Casual"/>
-                <a:cs typeface="Handy Casual"/>
+                <a:cs typeface="Arial" panose="020B0604020202020204" pitchFamily="34" charset="0"/>
                 <a:sym typeface="Handy Casual"/>
               </a:rPr>
               <a:t>Data Integrity</a:t>
@@ -6654,26 +6365,26 @@
       </p:sp>
       <p:sp>
         <p:nvSpPr>
-          <p:cNvPr name="TextBox 20" id="20"/>
-          <p:cNvSpPr txBox="true"/>
-          <p:nvPr/>
-        </p:nvSpPr>
-        <p:spPr>
-          <a:xfrm rot="0">
+          <p:cNvPr id="20" name="TextBox 20"/>
+          <p:cNvSpPr txBox="1"/>
+          <p:nvPr/>
+        </p:nvSpPr>
+        <p:spPr>
+          <a:xfrm>
             <a:off x="7782234" y="4621623"/>
-            <a:ext cx="2723531" cy="514013"/>
+            <a:ext cx="2723531" cy="491930"/>
           </a:xfrm>
           <a:prstGeom prst="rect">
             <a:avLst/>
           </a:prstGeom>
         </p:spPr>
         <p:txBody>
-          <a:bodyPr anchor="t" rtlCol="false" tIns="0" lIns="0" bIns="0" rIns="0">
+          <a:bodyPr lIns="0" tIns="0" rIns="0" bIns="0" rtlCol="0" anchor="t">
             <a:spAutoFit/>
           </a:bodyPr>
           <a:lstStyle/>
           <a:p>
-            <a:pPr algn="ctr" marL="0" indent="0" lvl="0">
+            <a:pPr marL="0" lvl="0" indent="0" algn="ctr">
               <a:lnSpc>
                 <a:spcPts val="4218"/>
               </a:lnSpc>
@@ -6682,13 +6393,13 @@
               </a:spcBef>
             </a:pPr>
             <a:r>
-              <a:rPr lang="en-US" sz="3013">
+              <a:rPr lang="en-US" sz="3013" dirty="0">
                 <a:solidFill>
                   <a:srgbClr val="000000"/>
                 </a:solidFill>
-                <a:latin typeface="Handy Casual"/>
+                <a:latin typeface="Arial" panose="020B0604020202020204" pitchFamily="34" charset="0"/>
                 <a:ea typeface="Handy Casual"/>
-                <a:cs typeface="Handy Casual"/>
+                <a:cs typeface="Arial" panose="020B0604020202020204" pitchFamily="34" charset="0"/>
                 <a:sym typeface="Handy Casual"/>
               </a:rPr>
               <a:t>Scalability</a:t>
@@ -6698,26 +6409,26 @@
       </p:sp>
       <p:sp>
         <p:nvSpPr>
-          <p:cNvPr name="TextBox 21" id="21"/>
-          <p:cNvSpPr txBox="true"/>
-          <p:nvPr/>
-        </p:nvSpPr>
-        <p:spPr>
-          <a:xfrm rot="0">
-            <a:off x="11102228" y="4621623"/>
-            <a:ext cx="2717318" cy="514013"/>
+          <p:cNvPr id="21" name="TextBox 21"/>
+          <p:cNvSpPr txBox="1"/>
+          <p:nvPr/>
+        </p:nvSpPr>
+        <p:spPr>
+          <a:xfrm>
+            <a:off x="10812072" y="4651570"/>
+            <a:ext cx="3474899" cy="491930"/>
           </a:xfrm>
           <a:prstGeom prst="rect">
             <a:avLst/>
           </a:prstGeom>
         </p:spPr>
         <p:txBody>
-          <a:bodyPr anchor="t" rtlCol="false" tIns="0" lIns="0" bIns="0" rIns="0">
+          <a:bodyPr wrap="square" lIns="0" tIns="0" rIns="0" bIns="0" rtlCol="0" anchor="t">
             <a:spAutoFit/>
           </a:bodyPr>
           <a:lstStyle/>
           <a:p>
-            <a:pPr algn="ctr" marL="0" indent="0" lvl="0">
+            <a:pPr marL="0" lvl="0" indent="0" algn="ctr">
               <a:lnSpc>
                 <a:spcPts val="4218"/>
               </a:lnSpc>
@@ -6726,13 +6437,13 @@
               </a:spcBef>
             </a:pPr>
             <a:r>
-              <a:rPr lang="en-US" sz="3013">
+              <a:rPr lang="en-US" sz="2400" dirty="0">
                 <a:solidFill>
                   <a:srgbClr val="000000"/>
                 </a:solidFill>
-                <a:latin typeface="Handy Casual"/>
+                <a:latin typeface="Arial" panose="020B0604020202020204" pitchFamily="34" charset="0"/>
                 <a:ea typeface="Handy Casual"/>
-                <a:cs typeface="Handy Casual"/>
+                <a:cs typeface="Arial" panose="020B0604020202020204" pitchFamily="34" charset="0"/>
                 <a:sym typeface="Handy Casual"/>
               </a:rPr>
               <a:t>Easy Maintenance</a:t>
@@ -6742,26 +6453,26 @@
       </p:sp>
       <p:sp>
         <p:nvSpPr>
-          <p:cNvPr name="TextBox 22" id="22"/>
-          <p:cNvSpPr txBox="true"/>
-          <p:nvPr/>
-        </p:nvSpPr>
-        <p:spPr>
-          <a:xfrm rot="0">
-            <a:off x="14501734" y="4621623"/>
-            <a:ext cx="2558500" cy="514013"/>
+          <p:cNvPr id="22" name="TextBox 22"/>
+          <p:cNvSpPr txBox="1"/>
+          <p:nvPr/>
+        </p:nvSpPr>
+        <p:spPr>
+          <a:xfrm>
+            <a:off x="14226060" y="4608626"/>
+            <a:ext cx="3256380" cy="473976"/>
           </a:xfrm>
           <a:prstGeom prst="rect">
             <a:avLst/>
           </a:prstGeom>
         </p:spPr>
         <p:txBody>
-          <a:bodyPr anchor="t" rtlCol="false" tIns="0" lIns="0" bIns="0" rIns="0">
+          <a:bodyPr wrap="square" lIns="0" tIns="0" rIns="0" bIns="0" rtlCol="0" anchor="t">
             <a:spAutoFit/>
           </a:bodyPr>
           <a:lstStyle/>
           <a:p>
-            <a:pPr algn="ctr" marL="0" indent="0" lvl="0">
+            <a:pPr marL="0" lvl="0" indent="0" algn="ctr">
               <a:lnSpc>
                 <a:spcPts val="4218"/>
               </a:lnSpc>
@@ -6770,13 +6481,13 @@
               </a:spcBef>
             </a:pPr>
             <a:r>
-              <a:rPr lang="en-US" sz="3013">
+              <a:rPr lang="en-US" sz="2000" dirty="0">
                 <a:solidFill>
                   <a:srgbClr val="000000"/>
                 </a:solidFill>
-                <a:latin typeface="Handy Casual"/>
+                <a:latin typeface="Arial" panose="020B0604020202020204" pitchFamily="34" charset="0"/>
                 <a:ea typeface="Handy Casual"/>
-                <a:cs typeface="Handy Casual"/>
+                <a:cs typeface="Arial" panose="020B0604020202020204" pitchFamily="34" charset="0"/>
                 <a:sym typeface="Handy Casual"/>
               </a:rPr>
               <a:t>Reduced Redundancy</a:t>
@@ -6786,26 +6497,26 @@
       </p:sp>
       <p:sp>
         <p:nvSpPr>
-          <p:cNvPr name="TextBox 23" id="23"/>
-          <p:cNvSpPr txBox="true"/>
-          <p:nvPr/>
-        </p:nvSpPr>
-        <p:spPr>
-          <a:xfrm rot="0">
+          <p:cNvPr id="23" name="TextBox 23"/>
+          <p:cNvSpPr txBox="1"/>
+          <p:nvPr/>
+        </p:nvSpPr>
+        <p:spPr>
+          <a:xfrm>
             <a:off x="14593991" y="5527040"/>
-            <a:ext cx="2558500" cy="2347349"/>
+            <a:ext cx="2558500" cy="2127377"/>
           </a:xfrm>
           <a:prstGeom prst="rect">
             <a:avLst/>
           </a:prstGeom>
         </p:spPr>
         <p:txBody>
-          <a:bodyPr anchor="t" rtlCol="false" tIns="0" lIns="0" bIns="0" rIns="0">
+          <a:bodyPr lIns="0" tIns="0" rIns="0" bIns="0" rtlCol="0" anchor="t">
             <a:spAutoFit/>
           </a:bodyPr>
           <a:lstStyle/>
           <a:p>
-            <a:pPr algn="l" marL="0" indent="0" lvl="0">
+            <a:pPr marL="0" lvl="0" indent="0" algn="l">
               <a:lnSpc>
                 <a:spcPts val="2393"/>
               </a:lnSpc>
@@ -6814,13 +6525,13 @@
               </a:spcBef>
             </a:pPr>
             <a:r>
-              <a:rPr lang="en-US" sz="1709">
+              <a:rPr lang="en-US" sz="1709" dirty="0">
                 <a:solidFill>
                   <a:srgbClr val="000000"/>
                 </a:solidFill>
-                <a:latin typeface="Gloria Hallelujah"/>
+                <a:latin typeface="Arial" panose="020B0604020202020204" pitchFamily="34" charset="0"/>
                 <a:ea typeface="Gloria Hallelujah"/>
-                <a:cs typeface="Gloria Hallelujah"/>
+                <a:cs typeface="Arial" panose="020B0604020202020204" pitchFamily="34" charset="0"/>
                 <a:sym typeface="Gloria Hallelujah"/>
               </a:rPr>
               <a:t>Normalization eliminates duplicate data storage. This saves space, prevents inconsistencies, and ensures that updates only need to be made in one location.</a:t>
